--- a/proposals/2026-10_kcg-aiops-relay/kcg_summary.pptx
+++ b/proposals/2026-10_kcg-aiops-relay/kcg_summary.pptx
@@ -11038,7 +11038,7 @@
         </p:nvGraphicFramePr>
         <p:xfrm>
           <a:off x="316800" y="4561200"/>
-          <a:ext cx="6260400" cy="1359984"/>
+          <a:ext cx="6260400" cy="2065409"/>
         </p:xfrm>
         <a:graphic>
           <a:graphicData uri="http://schemas.openxmlformats.org/drawingml/2006/table">
@@ -11048,7 +11048,7 @@
                 <a:gridCol w="1330335"/>
                 <a:gridCol w="4930065"/>
               </a:tblGrid>
-              <a:tr h="333984">
+              <a:tr h="450000">
                 <a:tc>
                   <a:txBody>
                     <a:bodyPr wrap="square"/>
@@ -11066,7 +11066,7 @@
                         </a:spcAft>
                       </a:pPr>
                       <a:r>
-                        <a:rPr sz="1200" b="1">
+                        <a:rPr sz="1300" b="1">
                           <a:solidFill>
                             <a:srgbClr val="FFFFFF"/>
                           </a:solidFill>
@@ -11121,7 +11121,7 @@
                         </a:spcAft>
                       </a:pPr>
                       <a:r>
-                        <a:rPr sz="1200" b="1">
+                        <a:rPr sz="1300" b="1">
                           <a:solidFill>
                             <a:srgbClr val="FFFFFF"/>
                           </a:solidFill>
@@ -11160,7 +11160,7 @@
                   </a:tcPr>
                 </a:tc>
               </a:tr>
-              <a:tr h="342000">
+              <a:tr h="486000">
                 <a:tc>
                   <a:txBody>
                     <a:bodyPr wrap="square"/>
@@ -11178,7 +11178,7 @@
                         </a:spcAft>
                       </a:pPr>
                       <a:r>
-                        <a:rPr sz="1150" b="1">
+                        <a:rPr sz="1250" b="1">
                           <a:solidFill>
                             <a:srgbClr val="222222"/>
                           </a:solidFill>
@@ -11233,7 +11233,7 @@
                         </a:spcAft>
                       </a:pPr>
                       <a:r>
-                        <a:rPr sz="1150" b="0">
+                        <a:rPr sz="1250" b="0">
                           <a:solidFill>
                             <a:srgbClr val="222222"/>
                           </a:solidFill>
@@ -11272,7 +11272,7 @@
                   </a:tcPr>
                 </a:tc>
               </a:tr>
-              <a:tr h="342000">
+              <a:tr h="643409">
                 <a:tc>
                   <a:txBody>
                     <a:bodyPr wrap="square"/>
@@ -11290,7 +11290,7 @@
                         </a:spcAft>
                       </a:pPr>
                       <a:r>
-                        <a:rPr sz="1150" b="1">
+                        <a:rPr sz="1250" b="1">
                           <a:solidFill>
                             <a:srgbClr val="222222"/>
                           </a:solidFill>
@@ -11345,7 +11345,7 @@
                         </a:spcAft>
                       </a:pPr>
                       <a:r>
-                        <a:rPr sz="1150" b="0">
+                        <a:rPr sz="1250" b="0">
                           <a:solidFill>
                             <a:srgbClr val="222222"/>
                           </a:solidFill>
@@ -11384,7 +11384,7 @@
                   </a:tcPr>
                 </a:tc>
               </a:tr>
-              <a:tr h="342000">
+              <a:tr h="486000">
                 <a:tc>
                   <a:txBody>
                     <a:bodyPr wrap="square"/>
@@ -11402,7 +11402,7 @@
                         </a:spcAft>
                       </a:pPr>
                       <a:r>
-                        <a:rPr sz="1150" b="1">
+                        <a:rPr sz="1250" b="1">
                           <a:solidFill>
                             <a:srgbClr val="222222"/>
                           </a:solidFill>
@@ -11457,7 +11457,7 @@
                         </a:spcAft>
                       </a:pPr>
                       <a:r>
-                        <a:rPr sz="1150" b="0">
+                        <a:rPr sz="1250" b="0">
                           <a:solidFill>
                             <a:srgbClr val="222222"/>
                           </a:solidFill>
@@ -11508,7 +11508,7 @@
         </p:nvSpPr>
         <p:spPr>
           <a:xfrm>
-            <a:off x="302400" y="6043584"/>
+            <a:off x="302400" y="6749009"/>
             <a:ext cx="46800" cy="223200"/>
           </a:xfrm>
           <a:prstGeom prst="rect">
@@ -11552,7 +11552,7 @@
         </p:nvSpPr>
         <p:spPr>
           <a:xfrm>
-            <a:off x="392400" y="6029184"/>
+            <a:off x="392400" y="6734609"/>
             <a:ext cx="6156000" cy="251999"/>
           </a:xfrm>
           <a:prstGeom prst="rect">
@@ -11589,8 +11589,8 @@
           <p:nvPr/>
         </p:nvGraphicFramePr>
         <p:xfrm>
-          <a:off x="316800" y="6353184"/>
-          <a:ext cx="6260400" cy="667724"/>
+          <a:off x="316800" y="7058609"/>
+          <a:ext cx="6260400" cy="936000"/>
         </p:xfrm>
         <a:graphic>
           <a:graphicData uri="http://schemas.openxmlformats.org/drawingml/2006/table">
@@ -11600,7 +11600,7 @@
                 <a:gridCol w="1408590"/>
                 <a:gridCol w="4851810"/>
               </a:tblGrid>
-              <a:tr h="325724">
+              <a:tr h="450000">
                 <a:tc>
                   <a:txBody>
                     <a:bodyPr wrap="square"/>
@@ -11618,7 +11618,7 @@
                         </a:spcAft>
                       </a:pPr>
                       <a:r>
-                        <a:rPr sz="1150" b="1">
+                        <a:rPr sz="1250" b="1">
                           <a:solidFill>
                             <a:srgbClr val="FFFFFF"/>
                           </a:solidFill>
@@ -11673,7 +11673,7 @@
                         </a:spcAft>
                       </a:pPr>
                       <a:r>
-                        <a:rPr sz="1150" b="1">
+                        <a:rPr sz="1250" b="1">
                           <a:solidFill>
                             <a:srgbClr val="FFFFFF"/>
                           </a:solidFill>
@@ -11712,7 +11712,7 @@
                   </a:tcPr>
                 </a:tc>
               </a:tr>
-              <a:tr h="342000">
+              <a:tr h="486000">
                 <a:tc>
                   <a:txBody>
                     <a:bodyPr wrap="square"/>
@@ -11730,7 +11730,7 @@
                         </a:spcAft>
                       </a:pPr>
                       <a:r>
-                        <a:rPr sz="1100" b="1">
+                        <a:rPr sz="1200" b="1">
                           <a:solidFill>
                             <a:srgbClr val="222222"/>
                           </a:solidFill>
@@ -11785,7 +11785,7 @@
                         </a:spcAft>
                       </a:pPr>
                       <a:r>
-                        <a:rPr sz="1100" b="0">
+                        <a:rPr sz="1200" b="0">
                           <a:solidFill>
                             <a:srgbClr val="222222"/>
                           </a:solidFill>
@@ -11836,8 +11836,8 @@
         </p:nvSpPr>
         <p:spPr>
           <a:xfrm>
-            <a:off x="280800" y="7128908"/>
-            <a:ext cx="6332400" cy="342135"/>
+            <a:off x="280800" y="8102609"/>
+            <a:ext cx="6332400" cy="359291"/>
           </a:xfrm>
           <a:prstGeom prst="roundRect">
             <a:avLst>
@@ -11884,7 +11884,7 @@
               </a:spcAft>
             </a:pPr>
             <a:r>
-              <a:rPr sz="1050" b="1">
+              <a:rPr sz="1150" b="1">
                 <a:solidFill>
                   <a:srgbClr val="7F3F00"/>
                 </a:solidFill>
@@ -15912,7 +15912,7 @@
         <p:spPr>
           <a:xfrm>
             <a:off x="316800" y="2358000"/>
-            <a:ext cx="2026800" cy="941173"/>
+            <a:ext cx="2026800" cy="1007999"/>
           </a:xfrm>
           <a:prstGeom prst="rect">
             <a:avLst/>
@@ -16023,7 +16023,7 @@
         <p:spPr>
           <a:xfrm>
             <a:off x="352800" y="2617200"/>
-            <a:ext cx="1954800" cy="689173"/>
+            <a:ext cx="1954800" cy="756000"/>
           </a:xfrm>
           <a:prstGeom prst="rect">
             <a:avLst/>
@@ -16050,7 +16050,7 @@
               <a:buChar char="•"/>
             </a:pPr>
             <a:r>
-              <a:rPr sz="1100" b="0">
+              <a:rPr sz="1150" b="0">
                 <a:solidFill>
                   <a:srgbClr val="000000"/>
                 </a:solidFill>
@@ -16076,7 +16076,7 @@
               <a:buChar char="•"/>
             </a:pPr>
             <a:r>
-              <a:rPr sz="1100" b="0">
+              <a:rPr sz="1150" b="0">
                 <a:solidFill>
                   <a:srgbClr val="000000"/>
                 </a:solidFill>
@@ -16098,7 +16098,7 @@
         <p:spPr>
           <a:xfrm>
             <a:off x="2433600" y="2358000"/>
-            <a:ext cx="2026800" cy="941173"/>
+            <a:ext cx="2026800" cy="1007999"/>
           </a:xfrm>
           <a:prstGeom prst="rect">
             <a:avLst/>
@@ -16209,7 +16209,7 @@
         <p:spPr>
           <a:xfrm>
             <a:off x="2469600" y="2617200"/>
-            <a:ext cx="1954800" cy="689173"/>
+            <a:ext cx="1954800" cy="756000"/>
           </a:xfrm>
           <a:prstGeom prst="rect">
             <a:avLst/>
@@ -16236,7 +16236,7 @@
               <a:buChar char="•"/>
             </a:pPr>
             <a:r>
-              <a:rPr sz="1100" b="0">
+              <a:rPr sz="1150" b="0">
                 <a:solidFill>
                   <a:srgbClr val="000000"/>
                 </a:solidFill>
@@ -16262,7 +16262,7 @@
               <a:buChar char="•"/>
             </a:pPr>
             <a:r>
-              <a:rPr sz="1100" b="0">
+              <a:rPr sz="1150" b="0">
                 <a:solidFill>
                   <a:srgbClr val="000000"/>
                 </a:solidFill>
@@ -16284,7 +16284,7 @@
         <p:spPr>
           <a:xfrm>
             <a:off x="4550400" y="2358000"/>
-            <a:ext cx="2026800" cy="941173"/>
+            <a:ext cx="2026800" cy="1007999"/>
           </a:xfrm>
           <a:prstGeom prst="rect">
             <a:avLst/>
@@ -16395,7 +16395,7 @@
         <p:spPr>
           <a:xfrm>
             <a:off x="4586400" y="2617200"/>
-            <a:ext cx="1954800" cy="689173"/>
+            <a:ext cx="1954800" cy="756000"/>
           </a:xfrm>
           <a:prstGeom prst="rect">
             <a:avLst/>
@@ -16422,7 +16422,7 @@
               <a:buChar char="•"/>
             </a:pPr>
             <a:r>
-              <a:rPr sz="1100" b="0">
+              <a:rPr sz="1150" b="0">
                 <a:solidFill>
                   <a:srgbClr val="000000"/>
                 </a:solidFill>
@@ -16448,7 +16448,7 @@
               <a:buChar char="•"/>
             </a:pPr>
             <a:r>
-              <a:rPr sz="1100" b="0">
+              <a:rPr sz="1150" b="0">
                 <a:solidFill>
                   <a:srgbClr val="000000"/>
                 </a:solidFill>
@@ -16469,7 +16469,7 @@
         </p:nvSpPr>
         <p:spPr>
           <a:xfrm>
-            <a:off x="302400" y="3457573"/>
+            <a:off x="302400" y="3524399"/>
             <a:ext cx="46800" cy="223200"/>
           </a:xfrm>
           <a:prstGeom prst="rect">
@@ -16513,7 +16513,7 @@
         </p:nvSpPr>
         <p:spPr>
           <a:xfrm>
-            <a:off x="392400" y="3443173"/>
+            <a:off x="392400" y="3510000"/>
             <a:ext cx="6156000" cy="251999"/>
           </a:xfrm>
           <a:prstGeom prst="rect">
@@ -16550,8 +16550,8 @@
           <p:nvPr/>
         </p:nvGraphicFramePr>
         <p:xfrm>
-          <a:off x="316800" y="3767173"/>
-          <a:ext cx="6260400" cy="2065922"/>
+          <a:off x="316800" y="3834000"/>
+          <a:ext cx="6260400" cy="2380820"/>
         </p:xfrm>
         <a:graphic>
           <a:graphicData uri="http://schemas.openxmlformats.org/drawingml/2006/table">
@@ -16561,7 +16561,7 @@
                 <a:gridCol w="1721610"/>
                 <a:gridCol w="4538790"/>
               </a:tblGrid>
-              <a:tr h="333984">
+              <a:tr h="385444">
                 <a:tc>
                   <a:txBody>
                     <a:bodyPr wrap="square"/>
@@ -16579,7 +16579,7 @@
                         </a:spcAft>
                       </a:pPr>
                       <a:r>
-                        <a:rPr sz="1200" b="1">
+                        <a:rPr sz="1250" b="1">
                           <a:solidFill>
                             <a:srgbClr val="FFFFFF"/>
                           </a:solidFill>
@@ -16634,7 +16634,7 @@
                         </a:spcAft>
                       </a:pPr>
                       <a:r>
-                        <a:rPr sz="1200" b="1">
+                        <a:rPr sz="1250" b="1">
                           <a:solidFill>
                             <a:srgbClr val="FFFFFF"/>
                           </a:solidFill>
@@ -16673,7 +16673,7 @@
                   </a:tcPr>
                 </a:tc>
               </a:tr>
-              <a:tr h="523969">
+              <a:tr h="583689">
                 <a:tc>
                   <a:txBody>
                     <a:bodyPr wrap="square"/>
@@ -16691,7 +16691,7 @@
                         </a:spcAft>
                       </a:pPr>
                       <a:r>
-                        <a:rPr sz="1150" b="1">
+                        <a:rPr sz="1200" b="1">
                           <a:solidFill>
                             <a:srgbClr val="222222"/>
                           </a:solidFill>
@@ -16746,7 +16746,7 @@
                         </a:spcAft>
                       </a:pPr>
                       <a:r>
-                        <a:rPr sz="1150" b="0">
+                        <a:rPr sz="1200" b="0">
                           <a:solidFill>
                             <a:srgbClr val="222222"/>
                           </a:solidFill>
@@ -16785,7 +16785,7 @@
                   </a:tcPr>
                 </a:tc>
               </a:tr>
-              <a:tr h="523969">
+              <a:tr h="583689">
                 <a:tc>
                   <a:txBody>
                     <a:bodyPr wrap="square"/>
@@ -16803,7 +16803,7 @@
                         </a:spcAft>
                       </a:pPr>
                       <a:r>
-                        <a:rPr sz="1150" b="1">
+                        <a:rPr sz="1200" b="1">
                           <a:solidFill>
                             <a:srgbClr val="222222"/>
                           </a:solidFill>
@@ -16858,7 +16858,7 @@
                         </a:spcAft>
                       </a:pPr>
                       <a:r>
-                        <a:rPr sz="1150" b="0">
+                        <a:rPr sz="1200" b="0">
                           <a:solidFill>
                             <a:srgbClr val="222222"/>
                           </a:solidFill>
@@ -16897,7 +16897,7 @@
                   </a:tcPr>
                 </a:tc>
               </a:tr>
-              <a:tr h="342000">
+              <a:tr h="413999">
                 <a:tc>
                   <a:txBody>
                     <a:bodyPr wrap="square"/>
@@ -16915,7 +16915,7 @@
                         </a:spcAft>
                       </a:pPr>
                       <a:r>
-                        <a:rPr sz="1150" b="1">
+                        <a:rPr sz="1200" b="1">
                           <a:solidFill>
                             <a:srgbClr val="222222"/>
                           </a:solidFill>
@@ -16970,7 +16970,7 @@
                         </a:spcAft>
                       </a:pPr>
                       <a:r>
-                        <a:rPr sz="1150" b="0">
+                        <a:rPr sz="1200" b="0">
                           <a:solidFill>
                             <a:srgbClr val="222222"/>
                           </a:solidFill>
@@ -17009,7 +17009,7 @@
                   </a:tcPr>
                 </a:tc>
               </a:tr>
-              <a:tr h="342000">
+              <a:tr h="413999">
                 <a:tc>
                   <a:txBody>
                     <a:bodyPr wrap="square"/>
@@ -17027,7 +17027,7 @@
                         </a:spcAft>
                       </a:pPr>
                       <a:r>
-                        <a:rPr sz="1150" b="1">
+                        <a:rPr sz="1200" b="1">
                           <a:solidFill>
                             <a:srgbClr val="222222"/>
                           </a:solidFill>
@@ -17082,7 +17082,7 @@
                         </a:spcAft>
                       </a:pPr>
                       <a:r>
-                        <a:rPr sz="1150" b="0">
+                        <a:rPr sz="1200" b="0">
                           <a:solidFill>
                             <a:srgbClr val="222222"/>
                           </a:solidFill>
@@ -17133,7 +17133,7 @@
         </p:nvSpPr>
         <p:spPr>
           <a:xfrm>
-            <a:off x="302400" y="5955496"/>
+            <a:off x="302400" y="6337224"/>
             <a:ext cx="46800" cy="223200"/>
           </a:xfrm>
           <a:prstGeom prst="rect">
@@ -17177,7 +17177,7 @@
         </p:nvSpPr>
         <p:spPr>
           <a:xfrm>
-            <a:off x="392400" y="5941096"/>
+            <a:off x="392400" y="6322824"/>
             <a:ext cx="6156000" cy="251999"/>
           </a:xfrm>
           <a:prstGeom prst="rect">
@@ -17214,8 +17214,8 @@
           <p:nvPr/>
         </p:nvGraphicFramePr>
         <p:xfrm>
-          <a:off x="316800" y="6265096"/>
-          <a:ext cx="6260400" cy="1351724"/>
+          <a:off x="316800" y="6646824"/>
+          <a:ext cx="6260400" cy="1619997"/>
         </p:xfrm>
         <a:graphic>
           <a:graphicData uri="http://schemas.openxmlformats.org/drawingml/2006/table">
@@ -17225,7 +17225,7 @@
                 <a:gridCol w="1408590"/>
                 <a:gridCol w="4851810"/>
               </a:tblGrid>
-              <a:tr h="325724">
+              <a:tr h="378000">
                 <a:tc>
                   <a:txBody>
                     <a:bodyPr wrap="square"/>
@@ -17243,7 +17243,7 @@
                         </a:spcAft>
                       </a:pPr>
                       <a:r>
-                        <a:rPr sz="1150" b="1">
+                        <a:rPr sz="1200" b="1">
                           <a:solidFill>
                             <a:srgbClr val="FFFFFF"/>
                           </a:solidFill>
@@ -17298,7 +17298,7 @@
                         </a:spcAft>
                       </a:pPr>
                       <a:r>
-                        <a:rPr sz="1150" b="1">
+                        <a:rPr sz="1200" b="1">
                           <a:solidFill>
                             <a:srgbClr val="FFFFFF"/>
                           </a:solidFill>
@@ -17337,7 +17337,7 @@
                   </a:tcPr>
                 </a:tc>
               </a:tr>
-              <a:tr h="342000">
+              <a:tr h="413999">
                 <a:tc>
                   <a:txBody>
                     <a:bodyPr wrap="square"/>
@@ -17355,7 +17355,7 @@
                         </a:spcAft>
                       </a:pPr>
                       <a:r>
-                        <a:rPr sz="1100" b="1">
+                        <a:rPr sz="1150" b="1">
                           <a:solidFill>
                             <a:srgbClr val="222222"/>
                           </a:solidFill>
@@ -17410,7 +17410,7 @@
                         </a:spcAft>
                       </a:pPr>
                       <a:r>
-                        <a:rPr sz="1100" b="0">
+                        <a:rPr sz="1150" b="0">
                           <a:solidFill>
                             <a:srgbClr val="222222"/>
                           </a:solidFill>
@@ -17449,7 +17449,7 @@
                   </a:tcPr>
                 </a:tc>
               </a:tr>
-              <a:tr h="342000">
+              <a:tr h="413999">
                 <a:tc>
                   <a:txBody>
                     <a:bodyPr wrap="square"/>
@@ -17467,7 +17467,7 @@
                         </a:spcAft>
                       </a:pPr>
                       <a:r>
-                        <a:rPr sz="1100" b="1">
+                        <a:rPr sz="1150" b="1">
                           <a:solidFill>
                             <a:srgbClr val="222222"/>
                           </a:solidFill>
@@ -17522,7 +17522,7 @@
                         </a:spcAft>
                       </a:pPr>
                       <a:r>
-                        <a:rPr sz="1100" b="0">
+                        <a:rPr sz="1150" b="0">
                           <a:solidFill>
                             <a:srgbClr val="222222"/>
                           </a:solidFill>
@@ -17561,7 +17561,7 @@
                   </a:tcPr>
                 </a:tc>
               </a:tr>
-              <a:tr h="342000">
+              <a:tr h="413999">
                 <a:tc>
                   <a:txBody>
                     <a:bodyPr wrap="square"/>
@@ -17579,7 +17579,7 @@
                         </a:spcAft>
                       </a:pPr>
                       <a:r>
-                        <a:rPr sz="1100" b="1">
+                        <a:rPr sz="1150" b="1">
                           <a:solidFill>
                             <a:srgbClr val="222222"/>
                           </a:solidFill>
@@ -17634,7 +17634,7 @@
                         </a:spcAft>
                       </a:pPr>
                       <a:r>
-                        <a:rPr sz="1100" b="0">
+                        <a:rPr sz="1150" b="0">
                           <a:solidFill>
                             <a:srgbClr val="222222"/>
                           </a:solidFill>
@@ -17685,8 +17685,8 @@
         </p:nvSpPr>
         <p:spPr>
           <a:xfrm>
-            <a:off x="280800" y="7724820"/>
-            <a:ext cx="6332400" cy="342135"/>
+            <a:off x="280800" y="8374824"/>
+            <a:ext cx="6332400" cy="350713"/>
           </a:xfrm>
           <a:prstGeom prst="roundRect">
             <a:avLst>
@@ -17733,7 +17733,7 @@
               </a:spcAft>
             </a:pPr>
             <a:r>
-              <a:rPr sz="1050" b="1">
+              <a:rPr sz="1100" b="1">
                 <a:solidFill>
                   <a:srgbClr val="7F3F00"/>
                 </a:solidFill>
@@ -18255,7 +18255,7 @@
         </p:nvGraphicFramePr>
         <p:xfrm>
           <a:off x="316800" y="2358000"/>
-          <a:ext cx="6260400" cy="2247891"/>
+          <a:ext cx="6260400" cy="2550510"/>
         </p:xfrm>
         <a:graphic>
           <a:graphicData uri="http://schemas.openxmlformats.org/drawingml/2006/table">
@@ -18265,7 +18265,7 @@
                 <a:gridCol w="1330335"/>
                 <a:gridCol w="4930065"/>
               </a:tblGrid>
-              <a:tr h="333984">
+              <a:tr h="385444">
                 <a:tc>
                   <a:txBody>
                     <a:bodyPr wrap="square"/>
@@ -18283,7 +18283,7 @@
                         </a:spcAft>
                       </a:pPr>
                       <a:r>
-                        <a:rPr sz="1200" b="1">
+                        <a:rPr sz="1250" b="1">
                           <a:solidFill>
                             <a:srgbClr val="FFFFFF"/>
                           </a:solidFill>
@@ -18338,7 +18338,7 @@
                         </a:spcAft>
                       </a:pPr>
                       <a:r>
-                        <a:rPr sz="1200" b="1">
+                        <a:rPr sz="1250" b="1">
                           <a:solidFill>
                             <a:srgbClr val="FFFFFF"/>
                           </a:solidFill>
@@ -18377,7 +18377,7 @@
                   </a:tcPr>
                 </a:tc>
               </a:tr>
-              <a:tr h="523969">
+              <a:tr h="583689">
                 <a:tc>
                   <a:txBody>
                     <a:bodyPr wrap="square"/>
@@ -18395,7 +18395,7 @@
                         </a:spcAft>
                       </a:pPr>
                       <a:r>
-                        <a:rPr sz="1150" b="1">
+                        <a:rPr sz="1200" b="1">
                           <a:solidFill>
                             <a:srgbClr val="222222"/>
                           </a:solidFill>
@@ -18450,7 +18450,7 @@
                         </a:spcAft>
                       </a:pPr>
                       <a:r>
-                        <a:rPr sz="1150" b="0">
+                        <a:rPr sz="1200" b="0">
                           <a:solidFill>
                             <a:srgbClr val="222222"/>
                           </a:solidFill>
@@ -18489,7 +18489,7 @@
                   </a:tcPr>
                 </a:tc>
               </a:tr>
-              <a:tr h="523969">
+              <a:tr h="583689">
                 <a:tc>
                   <a:txBody>
                     <a:bodyPr wrap="square"/>
@@ -18507,7 +18507,7 @@
                         </a:spcAft>
                       </a:pPr>
                       <a:r>
-                        <a:rPr sz="1150" b="1">
+                        <a:rPr sz="1200" b="1">
                           <a:solidFill>
                             <a:srgbClr val="222222"/>
                           </a:solidFill>
@@ -18562,7 +18562,7 @@
                         </a:spcAft>
                       </a:pPr>
                       <a:r>
-                        <a:rPr sz="1150" b="0">
+                        <a:rPr sz="1200" b="0">
                           <a:solidFill>
                             <a:srgbClr val="222222"/>
                           </a:solidFill>
@@ -18601,7 +18601,7 @@
                   </a:tcPr>
                 </a:tc>
               </a:tr>
-              <a:tr h="523969">
+              <a:tr h="583689">
                 <a:tc>
                   <a:txBody>
                     <a:bodyPr wrap="square"/>
@@ -18619,7 +18619,7 @@
                         </a:spcAft>
                       </a:pPr>
                       <a:r>
-                        <a:rPr sz="1150" b="1">
+                        <a:rPr sz="1200" b="1">
                           <a:solidFill>
                             <a:srgbClr val="222222"/>
                           </a:solidFill>
@@ -18674,7 +18674,7 @@
                         </a:spcAft>
                       </a:pPr>
                       <a:r>
-                        <a:rPr sz="1150" b="0">
+                        <a:rPr sz="1200" b="0">
                           <a:solidFill>
                             <a:srgbClr val="222222"/>
                           </a:solidFill>
@@ -18713,7 +18713,7 @@
                   </a:tcPr>
                 </a:tc>
               </a:tr>
-              <a:tr h="342000">
+              <a:tr h="413999">
                 <a:tc>
                   <a:txBody>
                     <a:bodyPr wrap="square"/>
@@ -18731,7 +18731,7 @@
                         </a:spcAft>
                       </a:pPr>
                       <a:r>
-                        <a:rPr sz="1150" b="1">
+                        <a:rPr sz="1200" b="1">
                           <a:solidFill>
                             <a:srgbClr val="222222"/>
                           </a:solidFill>
@@ -18786,7 +18786,7 @@
                         </a:spcAft>
                       </a:pPr>
                       <a:r>
-                        <a:rPr sz="1150" b="0">
+                        <a:rPr sz="1200" b="0">
                           <a:solidFill>
                             <a:srgbClr val="222222"/>
                           </a:solidFill>
@@ -18837,8 +18837,8 @@
         </p:nvSpPr>
         <p:spPr>
           <a:xfrm>
-            <a:off x="316800" y="4713892"/>
-            <a:ext cx="1165680" cy="846000"/>
+            <a:off x="316800" y="5016513"/>
+            <a:ext cx="1165680" cy="954000"/>
           </a:xfrm>
           <a:prstGeom prst="roundRect">
             <a:avLst>
@@ -18885,7 +18885,7 @@
         </p:nvSpPr>
         <p:spPr>
           <a:xfrm>
-            <a:off x="316800" y="4713892"/>
+            <a:off x="316800" y="5016513"/>
             <a:ext cx="1165680" cy="259200"/>
           </a:xfrm>
           <a:prstGeom prst="round2SameRect">
@@ -18953,8 +18953,8 @@
         </p:nvSpPr>
         <p:spPr>
           <a:xfrm>
-            <a:off x="352800" y="5001892"/>
-            <a:ext cx="1093680" cy="576000"/>
+            <a:off x="352800" y="5304513"/>
+            <a:ext cx="1093680" cy="684000"/>
           </a:xfrm>
           <a:prstGeom prst="rect">
             <a:avLst/>
@@ -18979,7 +18979,7 @@
               </a:spcAft>
             </a:pPr>
             <a:r>
-              <a:rPr sz="1100" b="0">
+              <a:rPr sz="1150" b="0">
                 <a:solidFill>
                   <a:srgbClr val="000000"/>
                 </a:solidFill>
@@ -19000,7 +19000,7 @@
         </p:nvSpPr>
         <p:spPr>
           <a:xfrm rot="5400000">
-            <a:off x="1493280" y="5093692"/>
+            <a:off x="1493280" y="5450313"/>
             <a:ext cx="86400" cy="79200"/>
           </a:xfrm>
           <a:prstGeom prst="triangle">
@@ -19044,8 +19044,8 @@
         </p:nvSpPr>
         <p:spPr>
           <a:xfrm>
-            <a:off x="1590480" y="4713892"/>
-            <a:ext cx="1165680" cy="846000"/>
+            <a:off x="1590480" y="5016513"/>
+            <a:ext cx="1165680" cy="954000"/>
           </a:xfrm>
           <a:prstGeom prst="roundRect">
             <a:avLst>
@@ -19092,7 +19092,7 @@
         </p:nvSpPr>
         <p:spPr>
           <a:xfrm>
-            <a:off x="1590480" y="4713892"/>
+            <a:off x="1590480" y="5016513"/>
             <a:ext cx="1165680" cy="259200"/>
           </a:xfrm>
           <a:prstGeom prst="round2SameRect">
@@ -19160,8 +19160,8 @@
         </p:nvSpPr>
         <p:spPr>
           <a:xfrm>
-            <a:off x="1626480" y="5001892"/>
-            <a:ext cx="1093680" cy="576000"/>
+            <a:off x="1626480" y="5304513"/>
+            <a:ext cx="1093680" cy="684000"/>
           </a:xfrm>
           <a:prstGeom prst="rect">
             <a:avLst/>
@@ -19186,7 +19186,7 @@
               </a:spcAft>
             </a:pPr>
             <a:r>
-              <a:rPr sz="1100" b="0">
+              <a:rPr sz="1150" b="0">
                 <a:solidFill>
                   <a:srgbClr val="000000"/>
                 </a:solidFill>
@@ -19207,7 +19207,7 @@
         </p:nvSpPr>
         <p:spPr>
           <a:xfrm rot="5400000">
-            <a:off x="2766960" y="5093692"/>
+            <a:off x="2766960" y="5450313"/>
             <a:ext cx="86400" cy="79200"/>
           </a:xfrm>
           <a:prstGeom prst="triangle">
@@ -19251,8 +19251,8 @@
         </p:nvSpPr>
         <p:spPr>
           <a:xfrm>
-            <a:off x="2864160" y="4713892"/>
-            <a:ext cx="1165680" cy="846000"/>
+            <a:off x="2864160" y="5016513"/>
+            <a:ext cx="1165680" cy="954000"/>
           </a:xfrm>
           <a:prstGeom prst="roundRect">
             <a:avLst>
@@ -19299,7 +19299,7 @@
         </p:nvSpPr>
         <p:spPr>
           <a:xfrm>
-            <a:off x="2864160" y="4713892"/>
+            <a:off x="2864160" y="5016513"/>
             <a:ext cx="1165680" cy="259200"/>
           </a:xfrm>
           <a:prstGeom prst="round2SameRect">
@@ -19367,8 +19367,8 @@
         </p:nvSpPr>
         <p:spPr>
           <a:xfrm>
-            <a:off x="2900160" y="5001892"/>
-            <a:ext cx="1093680" cy="576000"/>
+            <a:off x="2900160" y="5304513"/>
+            <a:ext cx="1093680" cy="684000"/>
           </a:xfrm>
           <a:prstGeom prst="rect">
             <a:avLst/>
@@ -19393,7 +19393,7 @@
               </a:spcAft>
             </a:pPr>
             <a:r>
-              <a:rPr sz="1100" b="0">
+              <a:rPr sz="1150" b="0">
                 <a:solidFill>
                   <a:srgbClr val="000000"/>
                 </a:solidFill>
@@ -19414,7 +19414,7 @@
         </p:nvSpPr>
         <p:spPr>
           <a:xfrm rot="5400000">
-            <a:off x="4040640" y="5093692"/>
+            <a:off x="4040640" y="5450313"/>
             <a:ext cx="86400" cy="79200"/>
           </a:xfrm>
           <a:prstGeom prst="triangle">
@@ -19458,8 +19458,8 @@
         </p:nvSpPr>
         <p:spPr>
           <a:xfrm>
-            <a:off x="4137840" y="4713892"/>
-            <a:ext cx="1165680" cy="846000"/>
+            <a:off x="4137840" y="5016513"/>
+            <a:ext cx="1165680" cy="954000"/>
           </a:xfrm>
           <a:prstGeom prst="roundRect">
             <a:avLst>
@@ -19506,7 +19506,7 @@
         </p:nvSpPr>
         <p:spPr>
           <a:xfrm>
-            <a:off x="4137840" y="4713892"/>
+            <a:off x="4137840" y="5016513"/>
             <a:ext cx="1165680" cy="259200"/>
           </a:xfrm>
           <a:prstGeom prst="round2SameRect">
@@ -19574,8 +19574,8 @@
         </p:nvSpPr>
         <p:spPr>
           <a:xfrm>
-            <a:off x="4173840" y="5001892"/>
-            <a:ext cx="1093680" cy="576000"/>
+            <a:off x="4173840" y="5304513"/>
+            <a:ext cx="1093680" cy="684000"/>
           </a:xfrm>
           <a:prstGeom prst="rect">
             <a:avLst/>
@@ -19600,7 +19600,7 @@
               </a:spcAft>
             </a:pPr>
             <a:r>
-              <a:rPr sz="1100" b="0">
+              <a:rPr sz="1150" b="0">
                 <a:solidFill>
                   <a:srgbClr val="000000"/>
                 </a:solidFill>
@@ -19621,7 +19621,7 @@
         </p:nvSpPr>
         <p:spPr>
           <a:xfrm rot="5400000">
-            <a:off x="5314320" y="5093692"/>
+            <a:off x="5314320" y="5450313"/>
             <a:ext cx="86400" cy="79200"/>
           </a:xfrm>
           <a:prstGeom prst="triangle">
@@ -19665,8 +19665,8 @@
         </p:nvSpPr>
         <p:spPr>
           <a:xfrm>
-            <a:off x="5411520" y="4713892"/>
-            <a:ext cx="1165680" cy="846000"/>
+            <a:off x="5411520" y="5016513"/>
+            <a:ext cx="1165680" cy="954000"/>
           </a:xfrm>
           <a:prstGeom prst="roundRect">
             <a:avLst>
@@ -19713,7 +19713,7 @@
         </p:nvSpPr>
         <p:spPr>
           <a:xfrm>
-            <a:off x="5411520" y="4713892"/>
+            <a:off x="5411520" y="5016513"/>
             <a:ext cx="1165680" cy="259200"/>
           </a:xfrm>
           <a:prstGeom prst="round2SameRect">
@@ -19781,8 +19781,8 @@
         </p:nvSpPr>
         <p:spPr>
           <a:xfrm>
-            <a:off x="5447520" y="5001892"/>
-            <a:ext cx="1093680" cy="576000"/>
+            <a:off x="5447520" y="5304513"/>
+            <a:ext cx="1093680" cy="684000"/>
           </a:xfrm>
           <a:prstGeom prst="rect">
             <a:avLst/>
@@ -19807,7 +19807,7 @@
               </a:spcAft>
             </a:pPr>
             <a:r>
-              <a:rPr sz="1100" b="0">
+              <a:rPr sz="1150" b="0">
                 <a:solidFill>
                   <a:srgbClr val="000000"/>
                 </a:solidFill>
@@ -19828,7 +19828,7 @@
         </p:nvSpPr>
         <p:spPr>
           <a:xfrm>
-            <a:off x="302400" y="5700292"/>
+            <a:off x="302400" y="6110913"/>
             <a:ext cx="46800" cy="223200"/>
           </a:xfrm>
           <a:prstGeom prst="rect">
@@ -19872,7 +19872,7 @@
         </p:nvSpPr>
         <p:spPr>
           <a:xfrm>
-            <a:off x="392400" y="5685892"/>
+            <a:off x="392400" y="6096513"/>
             <a:ext cx="6156000" cy="251999"/>
           </a:xfrm>
           <a:prstGeom prst="rect">
@@ -19909,8 +19909,8 @@
           <p:nvPr/>
         </p:nvGraphicFramePr>
         <p:xfrm>
-          <a:off x="316800" y="6009892"/>
-          <a:ext cx="6260400" cy="1351724"/>
+          <a:off x="316800" y="6420513"/>
+          <a:ext cx="6260400" cy="1619997"/>
         </p:xfrm>
         <a:graphic>
           <a:graphicData uri="http://schemas.openxmlformats.org/drawingml/2006/table">
@@ -19920,7 +19920,7 @@
                 <a:gridCol w="1408590"/>
                 <a:gridCol w="4851810"/>
               </a:tblGrid>
-              <a:tr h="325724">
+              <a:tr h="378000">
                 <a:tc>
                   <a:txBody>
                     <a:bodyPr wrap="square"/>
@@ -19938,7 +19938,7 @@
                         </a:spcAft>
                       </a:pPr>
                       <a:r>
-                        <a:rPr sz="1150" b="1">
+                        <a:rPr sz="1200" b="1">
                           <a:solidFill>
                             <a:srgbClr val="FFFFFF"/>
                           </a:solidFill>
@@ -19993,7 +19993,7 @@
                         </a:spcAft>
                       </a:pPr>
                       <a:r>
-                        <a:rPr sz="1150" b="1">
+                        <a:rPr sz="1200" b="1">
                           <a:solidFill>
                             <a:srgbClr val="FFFFFF"/>
                           </a:solidFill>
@@ -20032,7 +20032,7 @@
                   </a:tcPr>
                 </a:tc>
               </a:tr>
-              <a:tr h="342000">
+              <a:tr h="413999">
                 <a:tc>
                   <a:txBody>
                     <a:bodyPr wrap="square"/>
@@ -20050,7 +20050,7 @@
                         </a:spcAft>
                       </a:pPr>
                       <a:r>
-                        <a:rPr sz="1100" b="1">
+                        <a:rPr sz="1150" b="1">
                           <a:solidFill>
                             <a:srgbClr val="222222"/>
                           </a:solidFill>
@@ -20105,7 +20105,7 @@
                         </a:spcAft>
                       </a:pPr>
                       <a:r>
-                        <a:rPr sz="1100" b="0">
+                        <a:rPr sz="1150" b="0">
                           <a:solidFill>
                             <a:srgbClr val="222222"/>
                           </a:solidFill>
@@ -20144,7 +20144,7 @@
                   </a:tcPr>
                 </a:tc>
               </a:tr>
-              <a:tr h="342000">
+              <a:tr h="413999">
                 <a:tc>
                   <a:txBody>
                     <a:bodyPr wrap="square"/>
@@ -20162,7 +20162,7 @@
                         </a:spcAft>
                       </a:pPr>
                       <a:r>
-                        <a:rPr sz="1100" b="1">
+                        <a:rPr sz="1150" b="1">
                           <a:solidFill>
                             <a:srgbClr val="222222"/>
                           </a:solidFill>
@@ -20217,7 +20217,7 @@
                         </a:spcAft>
                       </a:pPr>
                       <a:r>
-                        <a:rPr sz="1100" b="0">
+                        <a:rPr sz="1150" b="0">
                           <a:solidFill>
                             <a:srgbClr val="222222"/>
                           </a:solidFill>
@@ -20256,7 +20256,7 @@
                   </a:tcPr>
                 </a:tc>
               </a:tr>
-              <a:tr h="342000">
+              <a:tr h="413999">
                 <a:tc>
                   <a:txBody>
                     <a:bodyPr wrap="square"/>
@@ -20274,7 +20274,7 @@
                         </a:spcAft>
                       </a:pPr>
                       <a:r>
-                        <a:rPr sz="1100" b="1">
+                        <a:rPr sz="1150" b="1">
                           <a:solidFill>
                             <a:srgbClr val="222222"/>
                           </a:solidFill>
@@ -20329,7 +20329,7 @@
                         </a:spcAft>
                       </a:pPr>
                       <a:r>
-                        <a:rPr sz="1100" b="0">
+                        <a:rPr sz="1150" b="0">
                           <a:solidFill>
                             <a:srgbClr val="222222"/>
                           </a:solidFill>
@@ -20380,8 +20380,8 @@
         </p:nvSpPr>
         <p:spPr>
           <a:xfrm>
-            <a:off x="280800" y="7469616"/>
-            <a:ext cx="6332400" cy="342135"/>
+            <a:off x="280800" y="8148513"/>
+            <a:ext cx="6332400" cy="350713"/>
           </a:xfrm>
           <a:prstGeom prst="roundRect">
             <a:avLst>
@@ -20428,7 +20428,7 @@
               </a:spcAft>
             </a:pPr>
             <a:r>
-              <a:rPr sz="1050" b="1">
+              <a:rPr sz="1100" b="1">
                 <a:solidFill>
                   <a:srgbClr val="7F3F00"/>
                 </a:solidFill>
@@ -21286,7 +21286,7 @@
         </p:nvGraphicFramePr>
         <p:xfrm>
           <a:off x="316800" y="2358000"/>
-          <a:ext cx="6260399" cy="3477798"/>
+          <a:ext cx="6260399" cy="3887578"/>
         </p:xfrm>
         <a:graphic>
           <a:graphicData uri="http://schemas.openxmlformats.org/drawingml/2006/table">
@@ -21296,7 +21296,7 @@
                 <a:gridCol w="1486844"/>
                 <a:gridCol w="4773555"/>
               </a:tblGrid>
-              <a:tr h="333984">
+              <a:tr h="385444">
                 <a:tc>
                   <a:txBody>
                     <a:bodyPr wrap="square"/>
@@ -21314,7 +21314,7 @@
                         </a:spcAft>
                       </a:pPr>
                       <a:r>
-                        <a:rPr sz="1200" b="1">
+                        <a:rPr sz="1250" b="1">
                           <a:solidFill>
                             <a:srgbClr val="FFFFFF"/>
                           </a:solidFill>
@@ -21369,7 +21369,7 @@
                         </a:spcAft>
                       </a:pPr>
                       <a:r>
-                        <a:rPr sz="1200" b="1">
+                        <a:rPr sz="1250" b="1">
                           <a:solidFill>
                             <a:srgbClr val="FFFFFF"/>
                           </a:solidFill>
@@ -21408,7 +21408,7 @@
                   </a:tcPr>
                 </a:tc>
               </a:tr>
-              <a:tr h="523969">
+              <a:tr h="583689">
                 <a:tc>
                   <a:txBody>
                     <a:bodyPr wrap="square"/>
@@ -21426,7 +21426,7 @@
                         </a:spcAft>
                       </a:pPr>
                       <a:r>
-                        <a:rPr sz="1150" b="1">
+                        <a:rPr sz="1200" b="1">
                           <a:solidFill>
                             <a:srgbClr val="222222"/>
                           </a:solidFill>
@@ -21481,7 +21481,7 @@
                         </a:spcAft>
                       </a:pPr>
                       <a:r>
-                        <a:rPr sz="1150" b="0">
+                        <a:rPr sz="1200" b="0">
                           <a:solidFill>
                             <a:srgbClr val="222222"/>
                           </a:solidFill>
@@ -21520,7 +21520,7 @@
                   </a:tcPr>
                 </a:tc>
               </a:tr>
-              <a:tr h="523969">
+              <a:tr h="583689">
                 <a:tc>
                   <a:txBody>
                     <a:bodyPr wrap="square"/>
@@ -21538,7 +21538,7 @@
                         </a:spcAft>
                       </a:pPr>
                       <a:r>
-                        <a:rPr sz="1150" b="1">
+                        <a:rPr sz="1200" b="1">
                           <a:solidFill>
                             <a:srgbClr val="222222"/>
                           </a:solidFill>
@@ -21593,7 +21593,7 @@
                         </a:spcAft>
                       </a:pPr>
                       <a:r>
-                        <a:rPr sz="1150" b="0">
+                        <a:rPr sz="1200" b="0">
                           <a:solidFill>
                             <a:srgbClr val="222222"/>
                           </a:solidFill>
@@ -21632,7 +21632,7 @@
                   </a:tcPr>
                 </a:tc>
               </a:tr>
-              <a:tr h="523969">
+              <a:tr h="583689">
                 <a:tc>
                   <a:txBody>
                     <a:bodyPr wrap="square"/>
@@ -21650,7 +21650,7 @@
                         </a:spcAft>
                       </a:pPr>
                       <a:r>
-                        <a:rPr sz="1150" b="1">
+                        <a:rPr sz="1200" b="1">
                           <a:solidFill>
                             <a:srgbClr val="222222"/>
                           </a:solidFill>
@@ -21705,7 +21705,7 @@
                         </a:spcAft>
                       </a:pPr>
                       <a:r>
-                        <a:rPr sz="1150" b="0">
+                        <a:rPr sz="1200" b="0">
                           <a:solidFill>
                             <a:srgbClr val="222222"/>
                           </a:solidFill>
@@ -21744,7 +21744,7 @@
                   </a:tcPr>
                 </a:tc>
               </a:tr>
-              <a:tr h="523969">
+              <a:tr h="583689">
                 <a:tc>
                   <a:txBody>
                     <a:bodyPr wrap="square"/>
@@ -21762,7 +21762,7 @@
                         </a:spcAft>
                       </a:pPr>
                       <a:r>
-                        <a:rPr sz="1150" b="1">
+                        <a:rPr sz="1200" b="1">
                           <a:solidFill>
                             <a:srgbClr val="222222"/>
                           </a:solidFill>
@@ -21817,7 +21817,7 @@
                         </a:spcAft>
                       </a:pPr>
                       <a:r>
-                        <a:rPr sz="1150" b="0">
+                        <a:rPr sz="1200" b="0">
                           <a:solidFill>
                             <a:srgbClr val="222222"/>
                           </a:solidFill>
@@ -21856,7 +21856,7 @@
                   </a:tcPr>
                 </a:tc>
               </a:tr>
-              <a:tr h="523969">
+              <a:tr h="583689">
                 <a:tc>
                   <a:txBody>
                     <a:bodyPr wrap="square"/>
@@ -21874,7 +21874,7 @@
                         </a:spcAft>
                       </a:pPr>
                       <a:r>
-                        <a:rPr sz="1150" b="1">
+                        <a:rPr sz="1200" b="1">
                           <a:solidFill>
                             <a:srgbClr val="222222"/>
                           </a:solidFill>
@@ -21929,7 +21929,7 @@
                         </a:spcAft>
                       </a:pPr>
                       <a:r>
-                        <a:rPr sz="1150" b="0">
+                        <a:rPr sz="1200" b="0">
                           <a:solidFill>
                             <a:srgbClr val="222222"/>
                           </a:solidFill>
@@ -21968,7 +21968,7 @@
                   </a:tcPr>
                 </a:tc>
               </a:tr>
-              <a:tr h="523969">
+              <a:tr h="583689">
                 <a:tc>
                   <a:txBody>
                     <a:bodyPr wrap="square"/>
@@ -21986,7 +21986,7 @@
                         </a:spcAft>
                       </a:pPr>
                       <a:r>
-                        <a:rPr sz="1150" b="1">
+                        <a:rPr sz="1200" b="1">
                           <a:solidFill>
                             <a:srgbClr val="222222"/>
                           </a:solidFill>
@@ -22041,7 +22041,7 @@
                         </a:spcAft>
                       </a:pPr>
                       <a:r>
-                        <a:rPr sz="1150" b="0">
+                        <a:rPr sz="1200" b="0">
                           <a:solidFill>
                             <a:srgbClr val="222222"/>
                           </a:solidFill>
@@ -22092,7 +22092,7 @@
         </p:nvSpPr>
         <p:spPr>
           <a:xfrm>
-            <a:off x="302400" y="5958199"/>
+            <a:off x="302400" y="6367982"/>
             <a:ext cx="46800" cy="223200"/>
           </a:xfrm>
           <a:prstGeom prst="rect">
@@ -22136,7 +22136,7 @@
         </p:nvSpPr>
         <p:spPr>
           <a:xfrm>
-            <a:off x="392400" y="5943799"/>
+            <a:off x="392400" y="6353582"/>
             <a:ext cx="6156000" cy="251999"/>
           </a:xfrm>
           <a:prstGeom prst="rect">
@@ -22173,8 +22173,8 @@
           <p:nvPr/>
         </p:nvGraphicFramePr>
         <p:xfrm>
-          <a:off x="316800" y="6267799"/>
-          <a:ext cx="6260400" cy="1351724"/>
+          <a:off x="316800" y="6677582"/>
+          <a:ext cx="6260400" cy="1619997"/>
         </p:xfrm>
         <a:graphic>
           <a:graphicData uri="http://schemas.openxmlformats.org/drawingml/2006/table">
@@ -22184,7 +22184,7 @@
                 <a:gridCol w="1408590"/>
                 <a:gridCol w="4851810"/>
               </a:tblGrid>
-              <a:tr h="325724">
+              <a:tr h="378000">
                 <a:tc>
                   <a:txBody>
                     <a:bodyPr wrap="square"/>
@@ -22202,7 +22202,7 @@
                         </a:spcAft>
                       </a:pPr>
                       <a:r>
-                        <a:rPr sz="1150" b="1">
+                        <a:rPr sz="1200" b="1">
                           <a:solidFill>
                             <a:srgbClr val="FFFFFF"/>
                           </a:solidFill>
@@ -22257,7 +22257,7 @@
                         </a:spcAft>
                       </a:pPr>
                       <a:r>
-                        <a:rPr sz="1150" b="1">
+                        <a:rPr sz="1200" b="1">
                           <a:solidFill>
                             <a:srgbClr val="FFFFFF"/>
                           </a:solidFill>
@@ -22296,7 +22296,7 @@
                   </a:tcPr>
                 </a:tc>
               </a:tr>
-              <a:tr h="342000">
+              <a:tr h="413999">
                 <a:tc>
                   <a:txBody>
                     <a:bodyPr wrap="square"/>
@@ -22314,7 +22314,7 @@
                         </a:spcAft>
                       </a:pPr>
                       <a:r>
-                        <a:rPr sz="1100" b="1">
+                        <a:rPr sz="1150" b="1">
                           <a:solidFill>
                             <a:srgbClr val="222222"/>
                           </a:solidFill>
@@ -22369,7 +22369,7 @@
                         </a:spcAft>
                       </a:pPr>
                       <a:r>
-                        <a:rPr sz="1100" b="0">
+                        <a:rPr sz="1150" b="0">
                           <a:solidFill>
                             <a:srgbClr val="222222"/>
                           </a:solidFill>
@@ -22408,7 +22408,7 @@
                   </a:tcPr>
                 </a:tc>
               </a:tr>
-              <a:tr h="342000">
+              <a:tr h="413999">
                 <a:tc>
                   <a:txBody>
                     <a:bodyPr wrap="square"/>
@@ -22426,7 +22426,7 @@
                         </a:spcAft>
                       </a:pPr>
                       <a:r>
-                        <a:rPr sz="1100" b="1">
+                        <a:rPr sz="1150" b="1">
                           <a:solidFill>
                             <a:srgbClr val="222222"/>
                           </a:solidFill>
@@ -22481,7 +22481,7 @@
                         </a:spcAft>
                       </a:pPr>
                       <a:r>
-                        <a:rPr sz="1100" b="0">
+                        <a:rPr sz="1150" b="0">
                           <a:solidFill>
                             <a:srgbClr val="222222"/>
                           </a:solidFill>
@@ -22520,7 +22520,7 @@
                   </a:tcPr>
                 </a:tc>
               </a:tr>
-              <a:tr h="342000">
+              <a:tr h="413999">
                 <a:tc>
                   <a:txBody>
                     <a:bodyPr wrap="square"/>
@@ -22538,7 +22538,7 @@
                         </a:spcAft>
                       </a:pPr>
                       <a:r>
-                        <a:rPr sz="1100" b="1">
+                        <a:rPr sz="1150" b="1">
                           <a:solidFill>
                             <a:srgbClr val="222222"/>
                           </a:solidFill>
@@ -22593,7 +22593,7 @@
                         </a:spcAft>
                       </a:pPr>
                       <a:r>
-                        <a:rPr sz="1100" b="0">
+                        <a:rPr sz="1150" b="0">
                           <a:solidFill>
                             <a:srgbClr val="222222"/>
                           </a:solidFill>
@@ -22644,8 +22644,8 @@
         </p:nvSpPr>
         <p:spPr>
           <a:xfrm>
-            <a:off x="280800" y="7727524"/>
-            <a:ext cx="6332400" cy="342135"/>
+            <a:off x="280800" y="8405582"/>
+            <a:ext cx="6332400" cy="539427"/>
           </a:xfrm>
           <a:prstGeom prst="roundRect">
             <a:avLst>
@@ -22692,7 +22692,7 @@
               </a:spcAft>
             </a:pPr>
             <a:r>
-              <a:rPr sz="1050" b="1">
+              <a:rPr sz="1100" b="1">
                 <a:solidFill>
                   <a:srgbClr val="7F3F00"/>
                 </a:solidFill>
@@ -23213,7 +23213,7 @@
         <p:spPr>
           <a:xfrm>
             <a:off x="316800" y="2358000"/>
-            <a:ext cx="5162400" cy="558000"/>
+            <a:ext cx="5162400" cy="666000"/>
           </a:xfrm>
           <a:prstGeom prst="rect">
             <a:avLst/>
@@ -23257,7 +23257,7 @@
         <p:spPr>
           <a:xfrm>
             <a:off x="334800" y="2358000"/>
-            <a:ext cx="864000" cy="558000"/>
+            <a:ext cx="864000" cy="666000"/>
           </a:xfrm>
           <a:prstGeom prst="rect">
             <a:avLst/>
@@ -23304,7 +23304,7 @@
         <p:spPr>
           <a:xfrm>
             <a:off x="1234800" y="2430000"/>
-            <a:ext cx="7200" cy="413999"/>
+            <a:ext cx="7200" cy="522000"/>
           </a:xfrm>
           <a:prstGeom prst="rect">
             <a:avLst/>
@@ -23348,7 +23348,7 @@
         <p:spPr>
           <a:xfrm>
             <a:off x="1324800" y="2466000"/>
-            <a:ext cx="2032200" cy="360000"/>
+            <a:ext cx="2032200" cy="468000"/>
           </a:xfrm>
           <a:prstGeom prst="roundRect">
             <a:avLst>
@@ -23417,7 +23417,7 @@
         <p:spPr>
           <a:xfrm>
             <a:off x="3446999" y="2466000"/>
-            <a:ext cx="2032200" cy="360000"/>
+            <a:ext cx="2032200" cy="468000"/>
           </a:xfrm>
           <a:prstGeom prst="roundRect">
             <a:avLst>
@@ -23486,7 +23486,7 @@
         <p:spPr>
           <a:xfrm>
             <a:off x="5569200" y="2358000"/>
-            <a:ext cx="1007999" cy="558000"/>
+            <a:ext cx="1007999" cy="666000"/>
           </a:xfrm>
           <a:prstGeom prst="rect">
             <a:avLst/>
@@ -23552,8 +23552,8 @@
         </p:nvSpPr>
         <p:spPr>
           <a:xfrm>
-            <a:off x="316800" y="2988000"/>
-            <a:ext cx="5162400" cy="558000"/>
+            <a:off x="316800" y="3096000"/>
+            <a:ext cx="5162400" cy="666000"/>
           </a:xfrm>
           <a:prstGeom prst="rect">
             <a:avLst/>
@@ -23596,8 +23596,8 @@
         </p:nvSpPr>
         <p:spPr>
           <a:xfrm>
-            <a:off x="334800" y="2988000"/>
-            <a:ext cx="864000" cy="558000"/>
+            <a:off x="334800" y="3096000"/>
+            <a:ext cx="864000" cy="666000"/>
           </a:xfrm>
           <a:prstGeom prst="rect">
             <a:avLst/>
@@ -23643,8 +23643,8 @@
         </p:nvSpPr>
         <p:spPr>
           <a:xfrm>
-            <a:off x="1234800" y="3060000"/>
-            <a:ext cx="7200" cy="413999"/>
+            <a:off x="1234800" y="3167999"/>
+            <a:ext cx="7200" cy="522000"/>
           </a:xfrm>
           <a:prstGeom prst="rect">
             <a:avLst/>
@@ -23687,8 +23687,8 @@
         </p:nvSpPr>
         <p:spPr>
           <a:xfrm>
-            <a:off x="1324800" y="3096000"/>
-            <a:ext cx="2032200" cy="360000"/>
+            <a:off x="1324800" y="3204000"/>
+            <a:ext cx="2032200" cy="468000"/>
           </a:xfrm>
           <a:prstGeom prst="roundRect">
             <a:avLst>
@@ -23756,8 +23756,8 @@
         </p:nvSpPr>
         <p:spPr>
           <a:xfrm>
-            <a:off x="3446999" y="3096000"/>
-            <a:ext cx="2032200" cy="360000"/>
+            <a:off x="3446999" y="3204000"/>
+            <a:ext cx="2032200" cy="468000"/>
           </a:xfrm>
           <a:prstGeom prst="roundRect">
             <a:avLst>
@@ -23825,8 +23825,8 @@
         </p:nvSpPr>
         <p:spPr>
           <a:xfrm>
-            <a:off x="5569200" y="2988000"/>
-            <a:ext cx="1007999" cy="558000"/>
+            <a:off x="5569200" y="3096000"/>
+            <a:ext cx="1007999" cy="666000"/>
           </a:xfrm>
           <a:prstGeom prst="rect">
             <a:avLst/>
@@ -23892,8 +23892,8 @@
         </p:nvSpPr>
         <p:spPr>
           <a:xfrm>
-            <a:off x="316800" y="3618000"/>
-            <a:ext cx="5162400" cy="558000"/>
+            <a:off x="316800" y="3834000"/>
+            <a:ext cx="5162400" cy="666000"/>
           </a:xfrm>
           <a:prstGeom prst="rect">
             <a:avLst/>
@@ -23936,8 +23936,8 @@
         </p:nvSpPr>
         <p:spPr>
           <a:xfrm>
-            <a:off x="334800" y="3618000"/>
-            <a:ext cx="864000" cy="558000"/>
+            <a:off x="334800" y="3834000"/>
+            <a:ext cx="864000" cy="666000"/>
           </a:xfrm>
           <a:prstGeom prst="rect">
             <a:avLst/>
@@ -23983,8 +23983,8 @@
         </p:nvSpPr>
         <p:spPr>
           <a:xfrm>
-            <a:off x="1234800" y="3690000"/>
-            <a:ext cx="7200" cy="413999"/>
+            <a:off x="1234800" y="3906000"/>
+            <a:ext cx="7200" cy="522000"/>
           </a:xfrm>
           <a:prstGeom prst="rect">
             <a:avLst/>
@@ -24027,8 +24027,8 @@
         </p:nvSpPr>
         <p:spPr>
           <a:xfrm>
-            <a:off x="1324800" y="3726000"/>
-            <a:ext cx="2032200" cy="360000"/>
+            <a:off x="1324800" y="3942000"/>
+            <a:ext cx="2032200" cy="468000"/>
           </a:xfrm>
           <a:prstGeom prst="roundRect">
             <a:avLst>
@@ -24096,8 +24096,8 @@
         </p:nvSpPr>
         <p:spPr>
           <a:xfrm>
-            <a:off x="3446999" y="3726000"/>
-            <a:ext cx="2032200" cy="360000"/>
+            <a:off x="3446999" y="3942000"/>
+            <a:ext cx="2032200" cy="468000"/>
           </a:xfrm>
           <a:prstGeom prst="roundRect">
             <a:avLst>
@@ -24165,8 +24165,8 @@
         </p:nvSpPr>
         <p:spPr>
           <a:xfrm>
-            <a:off x="5569200" y="3618000"/>
-            <a:ext cx="1007999" cy="558000"/>
+            <a:off x="5569200" y="3834000"/>
+            <a:ext cx="1007999" cy="666000"/>
           </a:xfrm>
           <a:prstGeom prst="rect">
             <a:avLst/>
@@ -24233,8 +24233,8 @@
           <p:nvPr/>
         </p:nvGraphicFramePr>
         <p:xfrm>
-          <a:off x="316800" y="4302000"/>
-          <a:ext cx="6260400" cy="1359984"/>
+          <a:off x="316800" y="4626000"/>
+          <a:ext cx="6260400" cy="2065409"/>
         </p:xfrm>
         <a:graphic>
           <a:graphicData uri="http://schemas.openxmlformats.org/drawingml/2006/table">
@@ -24245,7 +24245,7 @@
                 <a:gridCol w="3364965"/>
                 <a:gridCol w="1565100"/>
               </a:tblGrid>
-              <a:tr h="333984">
+              <a:tr h="450000">
                 <a:tc>
                   <a:txBody>
                     <a:bodyPr wrap="square"/>
@@ -24263,7 +24263,7 @@
                         </a:spcAft>
                       </a:pPr>
                       <a:r>
-                        <a:rPr sz="1200" b="1">
+                        <a:rPr sz="1300" b="1">
                           <a:solidFill>
                             <a:srgbClr val="FFFFFF"/>
                           </a:solidFill>
@@ -24318,7 +24318,7 @@
                         </a:spcAft>
                       </a:pPr>
                       <a:r>
-                        <a:rPr sz="1200" b="1">
+                        <a:rPr sz="1300" b="1">
                           <a:solidFill>
                             <a:srgbClr val="FFFFFF"/>
                           </a:solidFill>
@@ -24373,7 +24373,7 @@
                         </a:spcAft>
                       </a:pPr>
                       <a:r>
-                        <a:rPr sz="1200" b="1">
+                        <a:rPr sz="1300" b="1">
                           <a:solidFill>
                             <a:srgbClr val="FFFFFF"/>
                           </a:solidFill>
@@ -24412,7 +24412,7 @@
                   </a:tcPr>
                 </a:tc>
               </a:tr>
-              <a:tr h="342000">
+              <a:tr h="486000">
                 <a:tc>
                   <a:txBody>
                     <a:bodyPr wrap="square"/>
@@ -24430,7 +24430,7 @@
                         </a:spcAft>
                       </a:pPr>
                       <a:r>
-                        <a:rPr sz="1150" b="1">
+                        <a:rPr sz="1250" b="1">
                           <a:solidFill>
                             <a:srgbClr val="222222"/>
                           </a:solidFill>
@@ -24485,7 +24485,7 @@
                         </a:spcAft>
                       </a:pPr>
                       <a:r>
-                        <a:rPr sz="1150" b="0">
+                        <a:rPr sz="1250" b="0">
                           <a:solidFill>
                             <a:srgbClr val="222222"/>
                           </a:solidFill>
@@ -24540,7 +24540,7 @@
                         </a:spcAft>
                       </a:pPr>
                       <a:r>
-                        <a:rPr sz="1150" b="0">
+                        <a:rPr sz="1250" b="0">
                           <a:solidFill>
                             <a:srgbClr val="222222"/>
                           </a:solidFill>
@@ -24579,7 +24579,7 @@
                   </a:tcPr>
                 </a:tc>
               </a:tr>
-              <a:tr h="342000">
+              <a:tr h="486000">
                 <a:tc>
                   <a:txBody>
                     <a:bodyPr wrap="square"/>
@@ -24597,7 +24597,7 @@
                         </a:spcAft>
                       </a:pPr>
                       <a:r>
-                        <a:rPr sz="1150" b="1">
+                        <a:rPr sz="1250" b="1">
                           <a:solidFill>
                             <a:srgbClr val="222222"/>
                           </a:solidFill>
@@ -24652,7 +24652,7 @@
                         </a:spcAft>
                       </a:pPr>
                       <a:r>
-                        <a:rPr sz="1150" b="0">
+                        <a:rPr sz="1250" b="0">
                           <a:solidFill>
                             <a:srgbClr val="222222"/>
                           </a:solidFill>
@@ -24707,7 +24707,7 @@
                         </a:spcAft>
                       </a:pPr>
                       <a:r>
-                        <a:rPr sz="1150" b="0">
+                        <a:rPr sz="1250" b="0">
                           <a:solidFill>
                             <a:srgbClr val="222222"/>
                           </a:solidFill>
@@ -24746,7 +24746,7 @@
                   </a:tcPr>
                 </a:tc>
               </a:tr>
-              <a:tr h="342000">
+              <a:tr h="643409">
                 <a:tc>
                   <a:txBody>
                     <a:bodyPr wrap="square"/>
@@ -24764,7 +24764,7 @@
                         </a:spcAft>
                       </a:pPr>
                       <a:r>
-                        <a:rPr sz="1150" b="1">
+                        <a:rPr sz="1250" b="1">
                           <a:solidFill>
                             <a:srgbClr val="222222"/>
                           </a:solidFill>
@@ -24819,7 +24819,7 @@
                         </a:spcAft>
                       </a:pPr>
                       <a:r>
-                        <a:rPr sz="1150" b="0">
+                        <a:rPr sz="1250" b="0">
                           <a:solidFill>
                             <a:srgbClr val="222222"/>
                           </a:solidFill>
@@ -24874,7 +24874,7 @@
                         </a:spcAft>
                       </a:pPr>
                       <a:r>
-                        <a:rPr sz="1150" b="0">
+                        <a:rPr sz="1250" b="0">
                           <a:solidFill>
                             <a:srgbClr val="222222"/>
                           </a:solidFill>
@@ -24925,7 +24925,7 @@
         </p:nvSpPr>
         <p:spPr>
           <a:xfrm>
-            <a:off x="302400" y="5784384"/>
+            <a:off x="302400" y="6813810"/>
             <a:ext cx="46800" cy="223200"/>
           </a:xfrm>
           <a:prstGeom prst="rect">
@@ -24969,7 +24969,7 @@
         </p:nvSpPr>
         <p:spPr>
           <a:xfrm>
-            <a:off x="392400" y="5769984"/>
+            <a:off x="392400" y="6799410"/>
             <a:ext cx="6156000" cy="251999"/>
           </a:xfrm>
           <a:prstGeom prst="rect">
@@ -25006,8 +25006,8 @@
           <p:nvPr/>
         </p:nvGraphicFramePr>
         <p:xfrm>
-          <a:off x="316800" y="6093984"/>
-          <a:ext cx="6260400" cy="1009724"/>
+          <a:off x="316800" y="7123410"/>
+          <a:ext cx="6260400" cy="1422000"/>
         </p:xfrm>
         <a:graphic>
           <a:graphicData uri="http://schemas.openxmlformats.org/drawingml/2006/table">
@@ -25017,7 +25017,7 @@
                 <a:gridCol w="1408590"/>
                 <a:gridCol w="4851810"/>
               </a:tblGrid>
-              <a:tr h="325724">
+              <a:tr h="450000">
                 <a:tc>
                   <a:txBody>
                     <a:bodyPr wrap="square"/>
@@ -25035,7 +25035,7 @@
                         </a:spcAft>
                       </a:pPr>
                       <a:r>
-                        <a:rPr sz="1150" b="1">
+                        <a:rPr sz="1250" b="1">
                           <a:solidFill>
                             <a:srgbClr val="FFFFFF"/>
                           </a:solidFill>
@@ -25090,7 +25090,7 @@
                         </a:spcAft>
                       </a:pPr>
                       <a:r>
-                        <a:rPr sz="1150" b="1">
+                        <a:rPr sz="1250" b="1">
                           <a:solidFill>
                             <a:srgbClr val="FFFFFF"/>
                           </a:solidFill>
@@ -25129,7 +25129,7 @@
                   </a:tcPr>
                 </a:tc>
               </a:tr>
-              <a:tr h="342000">
+              <a:tr h="486000">
                 <a:tc>
                   <a:txBody>
                     <a:bodyPr wrap="square"/>
@@ -25147,7 +25147,7 @@
                         </a:spcAft>
                       </a:pPr>
                       <a:r>
-                        <a:rPr sz="1100" b="1">
+                        <a:rPr sz="1200" b="1">
                           <a:solidFill>
                             <a:srgbClr val="222222"/>
                           </a:solidFill>
@@ -25202,7 +25202,7 @@
                         </a:spcAft>
                       </a:pPr>
                       <a:r>
-                        <a:rPr sz="1100" b="0">
+                        <a:rPr sz="1200" b="0">
                           <a:solidFill>
                             <a:srgbClr val="222222"/>
                           </a:solidFill>
@@ -25241,7 +25241,7 @@
                   </a:tcPr>
                 </a:tc>
               </a:tr>
-              <a:tr h="342000">
+              <a:tr h="486000">
                 <a:tc>
                   <a:txBody>
                     <a:bodyPr wrap="square"/>
@@ -25259,7 +25259,7 @@
                         </a:spcAft>
                       </a:pPr>
                       <a:r>
-                        <a:rPr sz="1100" b="1">
+                        <a:rPr sz="1200" b="1">
                           <a:solidFill>
                             <a:srgbClr val="222222"/>
                           </a:solidFill>
@@ -25314,7 +25314,7 @@
                         </a:spcAft>
                       </a:pPr>
                       <a:r>
-                        <a:rPr sz="1100" b="0">
+                        <a:rPr sz="1200" b="0">
                           <a:solidFill>
                             <a:srgbClr val="222222"/>
                           </a:solidFill>
@@ -25365,8 +25365,8 @@
         </p:nvSpPr>
         <p:spPr>
           <a:xfrm>
-            <a:off x="280800" y="7211709"/>
-            <a:ext cx="6332400" cy="342135"/>
+            <a:off x="280800" y="8653410"/>
+            <a:ext cx="6332400" cy="359291"/>
           </a:xfrm>
           <a:prstGeom prst="roundRect">
             <a:avLst>
@@ -25413,7 +25413,7 @@
               </a:spcAft>
             </a:pPr>
             <a:r>
-              <a:rPr sz="1050" b="1">
+              <a:rPr sz="1150" b="1">
                 <a:solidFill>
                   <a:srgbClr val="7F3F00"/>
                 </a:solidFill>
@@ -25935,7 +25935,7 @@
         </p:nvGraphicFramePr>
         <p:xfrm>
           <a:off x="316800" y="2358000"/>
-          <a:ext cx="6260399" cy="2247891"/>
+          <a:ext cx="6260399" cy="2720200"/>
         </p:xfrm>
         <a:graphic>
           <a:graphicData uri="http://schemas.openxmlformats.org/drawingml/2006/table">
@@ -25945,7 +25945,7 @@
                 <a:gridCol w="1486844"/>
                 <a:gridCol w="4773555"/>
               </a:tblGrid>
-              <a:tr h="333984">
+              <a:tr h="385444">
                 <a:tc>
                   <a:txBody>
                     <a:bodyPr wrap="square"/>
@@ -25963,7 +25963,7 @@
                         </a:spcAft>
                       </a:pPr>
                       <a:r>
-                        <a:rPr sz="1200" b="1">
+                        <a:rPr sz="1250" b="1">
                           <a:solidFill>
                             <a:srgbClr val="FFFFFF"/>
                           </a:solidFill>
@@ -26018,7 +26018,7 @@
                         </a:spcAft>
                       </a:pPr>
                       <a:r>
-                        <a:rPr sz="1200" b="1">
+                        <a:rPr sz="1250" b="1">
                           <a:solidFill>
                             <a:srgbClr val="FFFFFF"/>
                           </a:solidFill>
@@ -26057,7 +26057,7 @@
                   </a:tcPr>
                 </a:tc>
               </a:tr>
-              <a:tr h="342000">
+              <a:tr h="583689">
                 <a:tc>
                   <a:txBody>
                     <a:bodyPr wrap="square"/>
@@ -26075,7 +26075,7 @@
                         </a:spcAft>
                       </a:pPr>
                       <a:r>
-                        <a:rPr sz="1150" b="1">
+                        <a:rPr sz="1200" b="1">
                           <a:solidFill>
                             <a:srgbClr val="222222"/>
                           </a:solidFill>
@@ -26130,7 +26130,7 @@
                         </a:spcAft>
                       </a:pPr>
                       <a:r>
-                        <a:rPr sz="1150" b="0">
+                        <a:rPr sz="1200" b="0">
                           <a:solidFill>
                             <a:srgbClr val="222222"/>
                           </a:solidFill>
@@ -26169,7 +26169,7 @@
                   </a:tcPr>
                 </a:tc>
               </a:tr>
-              <a:tr h="523969">
+              <a:tr h="583689">
                 <a:tc>
                   <a:txBody>
                     <a:bodyPr wrap="square"/>
@@ -26187,7 +26187,7 @@
                         </a:spcAft>
                       </a:pPr>
                       <a:r>
-                        <a:rPr sz="1150" b="1">
+                        <a:rPr sz="1200" b="1">
                           <a:solidFill>
                             <a:srgbClr val="222222"/>
                           </a:solidFill>
@@ -26242,7 +26242,7 @@
                         </a:spcAft>
                       </a:pPr>
                       <a:r>
-                        <a:rPr sz="1150" b="0">
+                        <a:rPr sz="1200" b="0">
                           <a:solidFill>
                             <a:srgbClr val="222222"/>
                           </a:solidFill>
@@ -26281,7 +26281,7 @@
                   </a:tcPr>
                 </a:tc>
               </a:tr>
-              <a:tr h="523969">
+              <a:tr h="583689">
                 <a:tc>
                   <a:txBody>
                     <a:bodyPr wrap="square"/>
@@ -26299,7 +26299,7 @@
                         </a:spcAft>
                       </a:pPr>
                       <a:r>
-                        <a:rPr sz="1150" b="1">
+                        <a:rPr sz="1200" b="1">
                           <a:solidFill>
                             <a:srgbClr val="222222"/>
                           </a:solidFill>
@@ -26354,7 +26354,7 @@
                         </a:spcAft>
                       </a:pPr>
                       <a:r>
-                        <a:rPr sz="1150" b="0">
+                        <a:rPr sz="1200" b="0">
                           <a:solidFill>
                             <a:srgbClr val="222222"/>
                           </a:solidFill>
@@ -26393,7 +26393,7 @@
                   </a:tcPr>
                 </a:tc>
               </a:tr>
-              <a:tr h="523969">
+              <a:tr h="583689">
                 <a:tc>
                   <a:txBody>
                     <a:bodyPr wrap="square"/>
@@ -26411,7 +26411,7 @@
                         </a:spcAft>
                       </a:pPr>
                       <a:r>
-                        <a:rPr sz="1150" b="1">
+                        <a:rPr sz="1200" b="1">
                           <a:solidFill>
                             <a:srgbClr val="222222"/>
                           </a:solidFill>
@@ -26466,7 +26466,7 @@
                         </a:spcAft>
                       </a:pPr>
                       <a:r>
-                        <a:rPr sz="1150" b="0">
+                        <a:rPr sz="1200" b="0">
                           <a:solidFill>
                             <a:srgbClr val="222222"/>
                           </a:solidFill>
@@ -26517,8 +26517,8 @@
         </p:nvSpPr>
         <p:spPr>
           <a:xfrm>
-            <a:off x="316800" y="4713892"/>
-            <a:ext cx="1484100" cy="846000"/>
+            <a:off x="316800" y="5186203"/>
+            <a:ext cx="1484100" cy="954000"/>
           </a:xfrm>
           <a:prstGeom prst="roundRect">
             <a:avLst>
@@ -26565,7 +26565,7 @@
         </p:nvSpPr>
         <p:spPr>
           <a:xfrm>
-            <a:off x="316800" y="4713892"/>
+            <a:off x="316800" y="5186203"/>
             <a:ext cx="1484100" cy="259200"/>
           </a:xfrm>
           <a:prstGeom prst="round2SameRect">
@@ -26633,8 +26633,8 @@
         </p:nvSpPr>
         <p:spPr>
           <a:xfrm>
-            <a:off x="352800" y="5001892"/>
-            <a:ext cx="1412100" cy="576000"/>
+            <a:off x="352800" y="5474203"/>
+            <a:ext cx="1412100" cy="684000"/>
           </a:xfrm>
           <a:prstGeom prst="rect">
             <a:avLst/>
@@ -26659,7 +26659,7 @@
               </a:spcAft>
             </a:pPr>
             <a:r>
-              <a:rPr sz="1100" b="0">
+              <a:rPr sz="1150" b="0">
                 <a:solidFill>
                   <a:srgbClr val="000000"/>
                 </a:solidFill>
@@ -26680,7 +26680,7 @@
         </p:nvSpPr>
         <p:spPr>
           <a:xfrm rot="5400000">
-            <a:off x="1811700" y="5093692"/>
+            <a:off x="1811700" y="5620003"/>
             <a:ext cx="86400" cy="79200"/>
           </a:xfrm>
           <a:prstGeom prst="triangle">
@@ -26724,8 +26724,8 @@
         </p:nvSpPr>
         <p:spPr>
           <a:xfrm>
-            <a:off x="1908900" y="4713892"/>
-            <a:ext cx="1484100" cy="846000"/>
+            <a:off x="1908900" y="5186203"/>
+            <a:ext cx="1484100" cy="954000"/>
           </a:xfrm>
           <a:prstGeom prst="roundRect">
             <a:avLst>
@@ -26772,7 +26772,7 @@
         </p:nvSpPr>
         <p:spPr>
           <a:xfrm>
-            <a:off x="1908900" y="4713892"/>
+            <a:off x="1908900" y="5186203"/>
             <a:ext cx="1484100" cy="259200"/>
           </a:xfrm>
           <a:prstGeom prst="round2SameRect">
@@ -26840,8 +26840,8 @@
         </p:nvSpPr>
         <p:spPr>
           <a:xfrm>
-            <a:off x="1944900" y="5001892"/>
-            <a:ext cx="1412100" cy="576000"/>
+            <a:off x="1944900" y="5474203"/>
+            <a:ext cx="1412100" cy="684000"/>
           </a:xfrm>
           <a:prstGeom prst="rect">
             <a:avLst/>
@@ -26866,7 +26866,7 @@
               </a:spcAft>
             </a:pPr>
             <a:r>
-              <a:rPr sz="1100" b="0">
+              <a:rPr sz="1150" b="0">
                 <a:solidFill>
                   <a:srgbClr val="000000"/>
                 </a:solidFill>
@@ -26887,7 +26887,7 @@
         </p:nvSpPr>
         <p:spPr>
           <a:xfrm rot="5400000">
-            <a:off x="3403800" y="5093692"/>
+            <a:off x="3403800" y="5620003"/>
             <a:ext cx="86400" cy="79200"/>
           </a:xfrm>
           <a:prstGeom prst="triangle">
@@ -26931,8 +26931,8 @@
         </p:nvSpPr>
         <p:spPr>
           <a:xfrm>
-            <a:off x="3501000" y="4713892"/>
-            <a:ext cx="1484100" cy="846000"/>
+            <a:off x="3501000" y="5186203"/>
+            <a:ext cx="1484100" cy="954000"/>
           </a:xfrm>
           <a:prstGeom prst="roundRect">
             <a:avLst>
@@ -26979,7 +26979,7 @@
         </p:nvSpPr>
         <p:spPr>
           <a:xfrm>
-            <a:off x="3501000" y="4713892"/>
+            <a:off x="3501000" y="5186203"/>
             <a:ext cx="1484100" cy="259200"/>
           </a:xfrm>
           <a:prstGeom prst="round2SameRect">
@@ -27047,8 +27047,8 @@
         </p:nvSpPr>
         <p:spPr>
           <a:xfrm>
-            <a:off x="3537000" y="5001892"/>
-            <a:ext cx="1412100" cy="576000"/>
+            <a:off x="3537000" y="5474203"/>
+            <a:ext cx="1412100" cy="684000"/>
           </a:xfrm>
           <a:prstGeom prst="rect">
             <a:avLst/>
@@ -27073,7 +27073,7 @@
               </a:spcAft>
             </a:pPr>
             <a:r>
-              <a:rPr sz="1100" b="0">
+              <a:rPr sz="1150" b="0">
                 <a:solidFill>
                   <a:srgbClr val="000000"/>
                 </a:solidFill>
@@ -27094,7 +27094,7 @@
         </p:nvSpPr>
         <p:spPr>
           <a:xfrm rot="5400000">
-            <a:off x="4995900" y="5093692"/>
+            <a:off x="4995900" y="5620003"/>
             <a:ext cx="86400" cy="79200"/>
           </a:xfrm>
           <a:prstGeom prst="triangle">
@@ -27138,8 +27138,8 @@
         </p:nvSpPr>
         <p:spPr>
           <a:xfrm>
-            <a:off x="5093100" y="4713892"/>
-            <a:ext cx="1484100" cy="846000"/>
+            <a:off x="5093100" y="5186203"/>
+            <a:ext cx="1484100" cy="954000"/>
           </a:xfrm>
           <a:prstGeom prst="roundRect">
             <a:avLst>
@@ -27186,7 +27186,7 @@
         </p:nvSpPr>
         <p:spPr>
           <a:xfrm>
-            <a:off x="5093100" y="4713892"/>
+            <a:off x="5093100" y="5186203"/>
             <a:ext cx="1484100" cy="259200"/>
           </a:xfrm>
           <a:prstGeom prst="round2SameRect">
@@ -27254,8 +27254,8 @@
         </p:nvSpPr>
         <p:spPr>
           <a:xfrm>
-            <a:off x="5129100" y="5001892"/>
-            <a:ext cx="1412100" cy="576000"/>
+            <a:off x="5129100" y="5474203"/>
+            <a:ext cx="1412100" cy="684000"/>
           </a:xfrm>
           <a:prstGeom prst="rect">
             <a:avLst/>
@@ -27280,7 +27280,7 @@
               </a:spcAft>
             </a:pPr>
             <a:r>
-              <a:rPr sz="1100" b="0">
+              <a:rPr sz="1150" b="0">
                 <a:solidFill>
                   <a:srgbClr val="000000"/>
                 </a:solidFill>
@@ -27301,7 +27301,7 @@
         </p:nvSpPr>
         <p:spPr>
           <a:xfrm>
-            <a:off x="302400" y="5700292"/>
+            <a:off x="302400" y="6280603"/>
             <a:ext cx="46800" cy="223200"/>
           </a:xfrm>
           <a:prstGeom prst="rect">
@@ -27345,7 +27345,7 @@
         </p:nvSpPr>
         <p:spPr>
           <a:xfrm>
-            <a:off x="392400" y="5685892"/>
+            <a:off x="392400" y="6266203"/>
             <a:ext cx="6156000" cy="251999"/>
           </a:xfrm>
           <a:prstGeom prst="rect">
@@ -27382,8 +27382,8 @@
           <p:nvPr/>
         </p:nvGraphicFramePr>
         <p:xfrm>
-          <a:off x="316800" y="6009892"/>
-          <a:ext cx="6260400" cy="1351724"/>
+          <a:off x="316800" y="6590203"/>
+          <a:ext cx="6260400" cy="1619997"/>
         </p:xfrm>
         <a:graphic>
           <a:graphicData uri="http://schemas.openxmlformats.org/drawingml/2006/table">
@@ -27393,7 +27393,7 @@
                 <a:gridCol w="1408590"/>
                 <a:gridCol w="4851810"/>
               </a:tblGrid>
-              <a:tr h="325724">
+              <a:tr h="378000">
                 <a:tc>
                   <a:txBody>
                     <a:bodyPr wrap="square"/>
@@ -27411,7 +27411,7 @@
                         </a:spcAft>
                       </a:pPr>
                       <a:r>
-                        <a:rPr sz="1150" b="1">
+                        <a:rPr sz="1200" b="1">
                           <a:solidFill>
                             <a:srgbClr val="FFFFFF"/>
                           </a:solidFill>
@@ -27466,7 +27466,7 @@
                         </a:spcAft>
                       </a:pPr>
                       <a:r>
-                        <a:rPr sz="1150" b="1">
+                        <a:rPr sz="1200" b="1">
                           <a:solidFill>
                             <a:srgbClr val="FFFFFF"/>
                           </a:solidFill>
@@ -27505,7 +27505,7 @@
                   </a:tcPr>
                 </a:tc>
               </a:tr>
-              <a:tr h="342000">
+              <a:tr h="413999">
                 <a:tc>
                   <a:txBody>
                     <a:bodyPr wrap="square"/>
@@ -27523,7 +27523,7 @@
                         </a:spcAft>
                       </a:pPr>
                       <a:r>
-                        <a:rPr sz="1100" b="1">
+                        <a:rPr sz="1150" b="1">
                           <a:solidFill>
                             <a:srgbClr val="222222"/>
                           </a:solidFill>
@@ -27578,7 +27578,7 @@
                         </a:spcAft>
                       </a:pPr>
                       <a:r>
-                        <a:rPr sz="1100" b="0">
+                        <a:rPr sz="1150" b="0">
                           <a:solidFill>
                             <a:srgbClr val="222222"/>
                           </a:solidFill>
@@ -27617,7 +27617,7 @@
                   </a:tcPr>
                 </a:tc>
               </a:tr>
-              <a:tr h="342000">
+              <a:tr h="413999">
                 <a:tc>
                   <a:txBody>
                     <a:bodyPr wrap="square"/>
@@ -27635,7 +27635,7 @@
                         </a:spcAft>
                       </a:pPr>
                       <a:r>
-                        <a:rPr sz="1100" b="1">
+                        <a:rPr sz="1150" b="1">
                           <a:solidFill>
                             <a:srgbClr val="222222"/>
                           </a:solidFill>
@@ -27690,7 +27690,7 @@
                         </a:spcAft>
                       </a:pPr>
                       <a:r>
-                        <a:rPr sz="1100" b="0">
+                        <a:rPr sz="1150" b="0">
                           <a:solidFill>
                             <a:srgbClr val="222222"/>
                           </a:solidFill>
@@ -27729,7 +27729,7 @@
                   </a:tcPr>
                 </a:tc>
               </a:tr>
-              <a:tr h="342000">
+              <a:tr h="413999">
                 <a:tc>
                   <a:txBody>
                     <a:bodyPr wrap="square"/>
@@ -27747,7 +27747,7 @@
                         </a:spcAft>
                       </a:pPr>
                       <a:r>
-                        <a:rPr sz="1100" b="1">
+                        <a:rPr sz="1150" b="1">
                           <a:solidFill>
                             <a:srgbClr val="222222"/>
                           </a:solidFill>
@@ -27802,7 +27802,7 @@
                         </a:spcAft>
                       </a:pPr>
                       <a:r>
-                        <a:rPr sz="1100" b="0">
+                        <a:rPr sz="1150" b="0">
                           <a:solidFill>
                             <a:srgbClr val="222222"/>
                           </a:solidFill>
@@ -27853,8 +27853,8 @@
         </p:nvSpPr>
         <p:spPr>
           <a:xfrm>
-            <a:off x="280800" y="7469616"/>
-            <a:ext cx="6332400" cy="342135"/>
+            <a:off x="280800" y="8318203"/>
+            <a:ext cx="6332400" cy="350713"/>
           </a:xfrm>
           <a:prstGeom prst="roundRect">
             <a:avLst>
@@ -27901,7 +27901,7 @@
               </a:spcAft>
             </a:pPr>
             <a:r>
-              <a:rPr sz="1050" b="1">
+              <a:rPr sz="1100" b="1">
                 <a:solidFill>
                   <a:srgbClr val="7F3F00"/>
                 </a:solidFill>
@@ -28423,7 +28423,7 @@
         </p:nvGraphicFramePr>
         <p:xfrm>
           <a:off x="316800" y="2358000"/>
-          <a:ext cx="6260399" cy="2429860"/>
+          <a:ext cx="6260399" cy="3023636"/>
         </p:xfrm>
         <a:graphic>
           <a:graphicData uri="http://schemas.openxmlformats.org/drawingml/2006/table">
@@ -28433,7 +28433,7 @@
                 <a:gridCol w="1486844"/>
                 <a:gridCol w="4773555"/>
               </a:tblGrid>
-              <a:tr h="333984">
+              <a:tr h="450000">
                 <a:tc>
                   <a:txBody>
                     <a:bodyPr wrap="square"/>
@@ -28451,7 +28451,7 @@
                         </a:spcAft>
                       </a:pPr>
                       <a:r>
-                        <a:rPr sz="1200" b="1">
+                        <a:rPr sz="1300" b="1">
                           <a:solidFill>
                             <a:srgbClr val="FFFFFF"/>
                           </a:solidFill>
@@ -28506,7 +28506,7 @@
                         </a:spcAft>
                       </a:pPr>
                       <a:r>
-                        <a:rPr sz="1200" b="1">
+                        <a:rPr sz="1300" b="1">
                           <a:solidFill>
                             <a:srgbClr val="FFFFFF"/>
                           </a:solidFill>
@@ -28545,7 +28545,7 @@
                   </a:tcPr>
                 </a:tc>
               </a:tr>
-              <a:tr h="523969">
+              <a:tr h="643409">
                 <a:tc>
                   <a:txBody>
                     <a:bodyPr wrap="square"/>
@@ -28563,7 +28563,7 @@
                         </a:spcAft>
                       </a:pPr>
                       <a:r>
-                        <a:rPr sz="1150" b="1">
+                        <a:rPr sz="1250" b="1">
                           <a:solidFill>
                             <a:srgbClr val="222222"/>
                           </a:solidFill>
@@ -28618,7 +28618,7 @@
                         </a:spcAft>
                       </a:pPr>
                       <a:r>
-                        <a:rPr sz="1150" b="0">
+                        <a:rPr sz="1250" b="0">
                           <a:solidFill>
                             <a:srgbClr val="222222"/>
                           </a:solidFill>
@@ -28657,7 +28657,7 @@
                   </a:tcPr>
                 </a:tc>
               </a:tr>
-              <a:tr h="523969">
+              <a:tr h="643409">
                 <a:tc>
                   <a:txBody>
                     <a:bodyPr wrap="square"/>
@@ -28675,7 +28675,7 @@
                         </a:spcAft>
                       </a:pPr>
                       <a:r>
-                        <a:rPr sz="1150" b="1">
+                        <a:rPr sz="1250" b="1">
                           <a:solidFill>
                             <a:srgbClr val="222222"/>
                           </a:solidFill>
@@ -28730,7 +28730,7 @@
                         </a:spcAft>
                       </a:pPr>
                       <a:r>
-                        <a:rPr sz="1150" b="0">
+                        <a:rPr sz="1250" b="0">
                           <a:solidFill>
                             <a:srgbClr val="222222"/>
                           </a:solidFill>
@@ -28769,7 +28769,7 @@
                   </a:tcPr>
                 </a:tc>
               </a:tr>
-              <a:tr h="523969">
+              <a:tr h="643409">
                 <a:tc>
                   <a:txBody>
                     <a:bodyPr wrap="square"/>
@@ -28787,7 +28787,7 @@
                         </a:spcAft>
                       </a:pPr>
                       <a:r>
-                        <a:rPr sz="1150" b="1">
+                        <a:rPr sz="1250" b="1">
                           <a:solidFill>
                             <a:srgbClr val="222222"/>
                           </a:solidFill>
@@ -28842,7 +28842,7 @@
                         </a:spcAft>
                       </a:pPr>
                       <a:r>
-                        <a:rPr sz="1150" b="0">
+                        <a:rPr sz="1250" b="0">
                           <a:solidFill>
                             <a:srgbClr val="222222"/>
                           </a:solidFill>
@@ -28881,7 +28881,7 @@
                   </a:tcPr>
                 </a:tc>
               </a:tr>
-              <a:tr h="523969">
+              <a:tr h="643409">
                 <a:tc>
                   <a:txBody>
                     <a:bodyPr wrap="square"/>
@@ -28899,7 +28899,7 @@
                         </a:spcAft>
                       </a:pPr>
                       <a:r>
-                        <a:rPr sz="1150" b="1">
+                        <a:rPr sz="1250" b="1">
                           <a:solidFill>
                             <a:srgbClr val="222222"/>
                           </a:solidFill>
@@ -28954,7 +28954,7 @@
                         </a:spcAft>
                       </a:pPr>
                       <a:r>
-                        <a:rPr sz="1150" b="0">
+                        <a:rPr sz="1250" b="0">
                           <a:solidFill>
                             <a:srgbClr val="222222"/>
                           </a:solidFill>
@@ -29005,7 +29005,7 @@
         </p:nvSpPr>
         <p:spPr>
           <a:xfrm>
-            <a:off x="302400" y="4910261"/>
+            <a:off x="302400" y="5504039"/>
             <a:ext cx="46800" cy="223200"/>
           </a:xfrm>
           <a:prstGeom prst="rect">
@@ -29049,7 +29049,7 @@
         </p:nvSpPr>
         <p:spPr>
           <a:xfrm>
-            <a:off x="392400" y="4895861"/>
+            <a:off x="392400" y="5489640"/>
             <a:ext cx="6156000" cy="251999"/>
           </a:xfrm>
           <a:prstGeom prst="rect">
@@ -29086,8 +29086,8 @@
           <p:nvPr/>
         </p:nvGraphicFramePr>
         <p:xfrm>
-          <a:off x="316800" y="5219861"/>
-          <a:ext cx="6260400" cy="1693724"/>
+          <a:off x="316800" y="5813639"/>
+          <a:ext cx="6260400" cy="2394000"/>
         </p:xfrm>
         <a:graphic>
           <a:graphicData uri="http://schemas.openxmlformats.org/drawingml/2006/table">
@@ -29097,7 +29097,7 @@
                 <a:gridCol w="1408590"/>
                 <a:gridCol w="4851810"/>
               </a:tblGrid>
-              <a:tr h="325724">
+              <a:tr h="450000">
                 <a:tc>
                   <a:txBody>
                     <a:bodyPr wrap="square"/>
@@ -29115,7 +29115,7 @@
                         </a:spcAft>
                       </a:pPr>
                       <a:r>
-                        <a:rPr sz="1150" b="1">
+                        <a:rPr sz="1250" b="1">
                           <a:solidFill>
                             <a:srgbClr val="FFFFFF"/>
                           </a:solidFill>
@@ -29170,7 +29170,7 @@
                         </a:spcAft>
                       </a:pPr>
                       <a:r>
-                        <a:rPr sz="1150" b="1">
+                        <a:rPr sz="1250" b="1">
                           <a:solidFill>
                             <a:srgbClr val="FFFFFF"/>
                           </a:solidFill>
@@ -29209,7 +29209,7 @@
                   </a:tcPr>
                 </a:tc>
               </a:tr>
-              <a:tr h="342000">
+              <a:tr h="486000">
                 <a:tc>
                   <a:txBody>
                     <a:bodyPr wrap="square"/>
@@ -29227,7 +29227,7 @@
                         </a:spcAft>
                       </a:pPr>
                       <a:r>
-                        <a:rPr sz="1100" b="1">
+                        <a:rPr sz="1200" b="1">
                           <a:solidFill>
                             <a:srgbClr val="222222"/>
                           </a:solidFill>
@@ -29282,7 +29282,7 @@
                         </a:spcAft>
                       </a:pPr>
                       <a:r>
-                        <a:rPr sz="1100" b="0">
+                        <a:rPr sz="1200" b="0">
                           <a:solidFill>
                             <a:srgbClr val="222222"/>
                           </a:solidFill>
@@ -29321,7 +29321,7 @@
                   </a:tcPr>
                 </a:tc>
               </a:tr>
-              <a:tr h="342000">
+              <a:tr h="486000">
                 <a:tc>
                   <a:txBody>
                     <a:bodyPr wrap="square"/>
@@ -29339,7 +29339,7 @@
                         </a:spcAft>
                       </a:pPr>
                       <a:r>
-                        <a:rPr sz="1100" b="1">
+                        <a:rPr sz="1200" b="1">
                           <a:solidFill>
                             <a:srgbClr val="222222"/>
                           </a:solidFill>
@@ -29394,7 +29394,7 @@
                         </a:spcAft>
                       </a:pPr>
                       <a:r>
-                        <a:rPr sz="1100" b="0">
+                        <a:rPr sz="1200" b="0">
                           <a:solidFill>
                             <a:srgbClr val="222222"/>
                           </a:solidFill>
@@ -29433,7 +29433,7 @@
                   </a:tcPr>
                 </a:tc>
               </a:tr>
-              <a:tr h="342000">
+              <a:tr h="486000">
                 <a:tc>
                   <a:txBody>
                     <a:bodyPr wrap="square"/>
@@ -29451,7 +29451,7 @@
                         </a:spcAft>
                       </a:pPr>
                       <a:r>
-                        <a:rPr sz="1100" b="1">
+                        <a:rPr sz="1200" b="1">
                           <a:solidFill>
                             <a:srgbClr val="222222"/>
                           </a:solidFill>
@@ -29506,7 +29506,7 @@
                         </a:spcAft>
                       </a:pPr>
                       <a:r>
-                        <a:rPr sz="1100" b="0">
+                        <a:rPr sz="1200" b="0">
                           <a:solidFill>
                             <a:srgbClr val="222222"/>
                           </a:solidFill>
@@ -29545,7 +29545,7 @@
                   </a:tcPr>
                 </a:tc>
               </a:tr>
-              <a:tr h="342000">
+              <a:tr h="486000">
                 <a:tc>
                   <a:txBody>
                     <a:bodyPr wrap="square"/>
@@ -29563,7 +29563,7 @@
                         </a:spcAft>
                       </a:pPr>
                       <a:r>
-                        <a:rPr sz="1100" b="1">
+                        <a:rPr sz="1200" b="1">
                           <a:solidFill>
                             <a:srgbClr val="222222"/>
                           </a:solidFill>
@@ -29618,7 +29618,7 @@
                         </a:spcAft>
                       </a:pPr>
                       <a:r>
-                        <a:rPr sz="1100" b="0">
+                        <a:rPr sz="1200" b="0">
                           <a:solidFill>
                             <a:srgbClr val="222222"/>
                           </a:solidFill>
@@ -29669,8 +29669,8 @@
         </p:nvSpPr>
         <p:spPr>
           <a:xfrm>
-            <a:off x="280800" y="7021585"/>
-            <a:ext cx="6332400" cy="342135"/>
+            <a:off x="280800" y="8315639"/>
+            <a:ext cx="6332400" cy="359291"/>
           </a:xfrm>
           <a:prstGeom prst="roundRect">
             <a:avLst>
@@ -29717,7 +29717,7 @@
               </a:spcAft>
             </a:pPr>
             <a:r>
-              <a:rPr sz="1050" b="1">
+              <a:rPr sz="1150" b="1">
                 <a:solidFill>
                   <a:srgbClr val="7F3F00"/>
                 </a:solidFill>
@@ -30558,7 +30558,7 @@
         </p:nvGraphicFramePr>
         <p:xfrm>
           <a:off x="316800" y="2358000"/>
-          <a:ext cx="6260400" cy="2385984"/>
+          <a:ext cx="6260400" cy="3039128"/>
         </p:xfrm>
         <a:graphic>
           <a:graphicData uri="http://schemas.openxmlformats.org/drawingml/2006/table">
@@ -30568,7 +30568,7 @@
                 <a:gridCol w="2738925"/>
                 <a:gridCol w="3521475"/>
               </a:tblGrid>
-              <a:tr h="333984">
+              <a:tr h="385444">
                 <a:tc>
                   <a:txBody>
                     <a:bodyPr wrap="square"/>
@@ -30586,7 +30586,7 @@
                         </a:spcAft>
                       </a:pPr>
                       <a:r>
-                        <a:rPr sz="1200" b="1">
+                        <a:rPr sz="1250" b="1">
                           <a:solidFill>
                             <a:srgbClr val="FFFFFF"/>
                           </a:solidFill>
@@ -30641,7 +30641,7 @@
                         </a:spcAft>
                       </a:pPr>
                       <a:r>
-                        <a:rPr sz="1200" b="1">
+                        <a:rPr sz="1250" b="1">
                           <a:solidFill>
                             <a:srgbClr val="FFFFFF"/>
                           </a:solidFill>
@@ -30680,7 +30680,7 @@
                   </a:tcPr>
                 </a:tc>
               </a:tr>
-              <a:tr h="342000">
+              <a:tr h="413999">
                 <a:tc>
                   <a:txBody>
                     <a:bodyPr wrap="square"/>
@@ -30698,7 +30698,7 @@
                         </a:spcAft>
                       </a:pPr>
                       <a:r>
-                        <a:rPr sz="1150" b="1">
+                        <a:rPr sz="1200" b="1">
                           <a:solidFill>
                             <a:srgbClr val="222222"/>
                           </a:solidFill>
@@ -30753,7 +30753,7 @@
                         </a:spcAft>
                       </a:pPr>
                       <a:r>
-                        <a:rPr sz="1150" b="0">
+                        <a:rPr sz="1200" b="0">
                           <a:solidFill>
                             <a:srgbClr val="222222"/>
                           </a:solidFill>
@@ -30792,7 +30792,7 @@
                   </a:tcPr>
                 </a:tc>
               </a:tr>
-              <a:tr h="342000">
+              <a:tr h="413999">
                 <a:tc>
                   <a:txBody>
                     <a:bodyPr wrap="square"/>
@@ -30810,7 +30810,7 @@
                         </a:spcAft>
                       </a:pPr>
                       <a:r>
-                        <a:rPr sz="1150" b="1">
+                        <a:rPr sz="1200" b="1">
                           <a:solidFill>
                             <a:srgbClr val="222222"/>
                           </a:solidFill>
@@ -30865,7 +30865,7 @@
                         </a:spcAft>
                       </a:pPr>
                       <a:r>
-                        <a:rPr sz="1150" b="0">
+                        <a:rPr sz="1200" b="0">
                           <a:solidFill>
                             <a:srgbClr val="222222"/>
                           </a:solidFill>
@@ -30904,7 +30904,7 @@
                   </a:tcPr>
                 </a:tc>
               </a:tr>
-              <a:tr h="342000">
+              <a:tr h="413999">
                 <a:tc>
                   <a:txBody>
                     <a:bodyPr wrap="square"/>
@@ -30922,7 +30922,7 @@
                         </a:spcAft>
                       </a:pPr>
                       <a:r>
-                        <a:rPr sz="1150" b="1">
+                        <a:rPr sz="1200" b="1">
                           <a:solidFill>
                             <a:srgbClr val="222222"/>
                           </a:solidFill>
@@ -30977,7 +30977,7 @@
                         </a:spcAft>
                       </a:pPr>
                       <a:r>
-                        <a:rPr sz="1150" b="0">
+                        <a:rPr sz="1200" b="0">
                           <a:solidFill>
                             <a:srgbClr val="222222"/>
                           </a:solidFill>
@@ -31016,7 +31016,7 @@
                   </a:tcPr>
                 </a:tc>
               </a:tr>
-              <a:tr h="342000">
+              <a:tr h="583689">
                 <a:tc>
                   <a:txBody>
                     <a:bodyPr wrap="square"/>
@@ -31034,7 +31034,7 @@
                         </a:spcAft>
                       </a:pPr>
                       <a:r>
-                        <a:rPr sz="1150" b="1">
+                        <a:rPr sz="1200" b="1">
                           <a:solidFill>
                             <a:srgbClr val="222222"/>
                           </a:solidFill>
@@ -31089,7 +31089,7 @@
                         </a:spcAft>
                       </a:pPr>
                       <a:r>
-                        <a:rPr sz="1150" b="0">
+                        <a:rPr sz="1200" b="0">
                           <a:solidFill>
                             <a:srgbClr val="222222"/>
                           </a:solidFill>
@@ -31128,7 +31128,7 @@
                   </a:tcPr>
                 </a:tc>
               </a:tr>
-              <a:tr h="342000">
+              <a:tr h="413999">
                 <a:tc>
                   <a:txBody>
                     <a:bodyPr wrap="square"/>
@@ -31146,7 +31146,7 @@
                         </a:spcAft>
                       </a:pPr>
                       <a:r>
-                        <a:rPr sz="1150" b="1">
+                        <a:rPr sz="1200" b="1">
                           <a:solidFill>
                             <a:srgbClr val="222222"/>
                           </a:solidFill>
@@ -31201,7 +31201,7 @@
                         </a:spcAft>
                       </a:pPr>
                       <a:r>
-                        <a:rPr sz="1150" b="0">
+                        <a:rPr sz="1200" b="0">
                           <a:solidFill>
                             <a:srgbClr val="222222"/>
                           </a:solidFill>
@@ -31240,7 +31240,7 @@
                   </a:tcPr>
                 </a:tc>
               </a:tr>
-              <a:tr h="342000">
+              <a:tr h="413999">
                 <a:tc>
                   <a:txBody>
                     <a:bodyPr wrap="square"/>
@@ -31258,7 +31258,7 @@
                         </a:spcAft>
                       </a:pPr>
                       <a:r>
-                        <a:rPr sz="1150" b="1">
+                        <a:rPr sz="1200" b="1">
                           <a:solidFill>
                             <a:srgbClr val="222222"/>
                           </a:solidFill>
@@ -31313,7 +31313,7 @@
                         </a:spcAft>
                       </a:pPr>
                       <a:r>
-                        <a:rPr sz="1150" b="0">
+                        <a:rPr sz="1200" b="0">
                           <a:solidFill>
                             <a:srgbClr val="222222"/>
                           </a:solidFill>
@@ -31364,8 +31364,8 @@
         </p:nvSpPr>
         <p:spPr>
           <a:xfrm>
-            <a:off x="280800" y="4851984"/>
-            <a:ext cx="6332400" cy="1356480"/>
+            <a:off x="280800" y="5505134"/>
+            <a:ext cx="6332400" cy="1388250"/>
           </a:xfrm>
           <a:prstGeom prst="rect">
             <a:avLst/>
@@ -31408,8 +31408,8 @@
         </p:nvSpPr>
         <p:spPr>
           <a:xfrm>
-            <a:off x="334800" y="4887984"/>
-            <a:ext cx="6224400" cy="1320480"/>
+            <a:off x="334800" y="5541134"/>
+            <a:ext cx="6224400" cy="1352249"/>
           </a:xfrm>
           <a:prstGeom prst="rect">
             <a:avLst/>
@@ -31436,7 +31436,7 @@
               <a:buChar char="•"/>
             </a:pPr>
             <a:r>
-              <a:rPr sz="1200" b="0">
+              <a:rPr sz="1250" b="0">
                 <a:solidFill>
                   <a:srgbClr val="000000"/>
                 </a:solidFill>
@@ -31462,7 +31462,7 @@
               <a:buChar char="•"/>
             </a:pPr>
             <a:r>
-              <a:rPr sz="1200" b="0">
+              <a:rPr sz="1250" b="0">
                 <a:solidFill>
                   <a:srgbClr val="000000"/>
                 </a:solidFill>
@@ -31483,7 +31483,7 @@
         </p:nvSpPr>
         <p:spPr>
           <a:xfrm>
-            <a:off x="302400" y="6312864"/>
+            <a:off x="302400" y="6997784"/>
             <a:ext cx="46800" cy="223200"/>
           </a:xfrm>
           <a:prstGeom prst="rect">
@@ -31527,7 +31527,7 @@
         </p:nvSpPr>
         <p:spPr>
           <a:xfrm>
-            <a:off x="392400" y="6298464"/>
+            <a:off x="392400" y="6983384"/>
             <a:ext cx="6156000" cy="251999"/>
           </a:xfrm>
           <a:prstGeom prst="rect">
@@ -31564,8 +31564,8 @@
           <p:nvPr/>
         </p:nvGraphicFramePr>
         <p:xfrm>
-          <a:off x="316800" y="6622464"/>
-          <a:ext cx="6260400" cy="1009724"/>
+          <a:off x="316800" y="7307384"/>
+          <a:ext cx="6260400" cy="1205998"/>
         </p:xfrm>
         <a:graphic>
           <a:graphicData uri="http://schemas.openxmlformats.org/drawingml/2006/table">
@@ -31575,7 +31575,7 @@
                 <a:gridCol w="1408590"/>
                 <a:gridCol w="4851810"/>
               </a:tblGrid>
-              <a:tr h="325724">
+              <a:tr h="378000">
                 <a:tc>
                   <a:txBody>
                     <a:bodyPr wrap="square"/>
@@ -31593,7 +31593,7 @@
                         </a:spcAft>
                       </a:pPr>
                       <a:r>
-                        <a:rPr sz="1150" b="1">
+                        <a:rPr sz="1200" b="1">
                           <a:solidFill>
                             <a:srgbClr val="FFFFFF"/>
                           </a:solidFill>
@@ -31648,7 +31648,7 @@
                         </a:spcAft>
                       </a:pPr>
                       <a:r>
-                        <a:rPr sz="1150" b="1">
+                        <a:rPr sz="1200" b="1">
                           <a:solidFill>
                             <a:srgbClr val="FFFFFF"/>
                           </a:solidFill>
@@ -31687,7 +31687,7 @@
                   </a:tcPr>
                 </a:tc>
               </a:tr>
-              <a:tr h="342000">
+              <a:tr h="413999">
                 <a:tc>
                   <a:txBody>
                     <a:bodyPr wrap="square"/>
@@ -31705,7 +31705,7 @@
                         </a:spcAft>
                       </a:pPr>
                       <a:r>
-                        <a:rPr sz="1100" b="1">
+                        <a:rPr sz="1150" b="1">
                           <a:solidFill>
                             <a:srgbClr val="222222"/>
                           </a:solidFill>
@@ -31760,7 +31760,7 @@
                         </a:spcAft>
                       </a:pPr>
                       <a:r>
-                        <a:rPr sz="1100" b="0">
+                        <a:rPr sz="1150" b="0">
                           <a:solidFill>
                             <a:srgbClr val="222222"/>
                           </a:solidFill>
@@ -31799,7 +31799,7 @@
                   </a:tcPr>
                 </a:tc>
               </a:tr>
-              <a:tr h="342000">
+              <a:tr h="413999">
                 <a:tc>
                   <a:txBody>
                     <a:bodyPr wrap="square"/>
@@ -31817,7 +31817,7 @@
                         </a:spcAft>
                       </a:pPr>
                       <a:r>
-                        <a:rPr sz="1100" b="1">
+                        <a:rPr sz="1150" b="1">
                           <a:solidFill>
                             <a:srgbClr val="222222"/>
                           </a:solidFill>
@@ -31872,7 +31872,7 @@
                         </a:spcAft>
                       </a:pPr>
                       <a:r>
-                        <a:rPr sz="1100" b="0">
+                        <a:rPr sz="1150" b="0">
                           <a:solidFill>
                             <a:srgbClr val="222222"/>
                           </a:solidFill>
@@ -31923,8 +31923,8 @@
         </p:nvSpPr>
         <p:spPr>
           <a:xfrm>
-            <a:off x="280800" y="7740188"/>
-            <a:ext cx="6332400" cy="342135"/>
+            <a:off x="280800" y="8621384"/>
+            <a:ext cx="6332400" cy="350713"/>
           </a:xfrm>
           <a:prstGeom prst="roundRect">
             <a:avLst>
@@ -31971,7 +31971,7 @@
               </a:spcAft>
             </a:pPr>
             <a:r>
-              <a:rPr sz="1050" b="1">
+              <a:rPr sz="1100" b="1">
                 <a:solidFill>
                   <a:srgbClr val="7F3F00"/>
                 </a:solidFill>
@@ -32492,7 +32492,7 @@
         <p:spPr>
           <a:xfrm>
             <a:off x="316800" y="2358000"/>
-            <a:ext cx="1484100" cy="846000"/>
+            <a:ext cx="1484100" cy="1278000"/>
           </a:xfrm>
           <a:prstGeom prst="roundRect">
             <a:avLst>
@@ -32608,7 +32608,7 @@
         <p:spPr>
           <a:xfrm>
             <a:off x="352800" y="2646000"/>
-            <a:ext cx="1412100" cy="576000"/>
+            <a:ext cx="1412100" cy="1007999"/>
           </a:xfrm>
           <a:prstGeom prst="rect">
             <a:avLst/>
@@ -32633,7 +32633,7 @@
               </a:spcAft>
             </a:pPr>
             <a:r>
-              <a:rPr sz="1100" b="0">
+              <a:rPr sz="1300" b="0">
                 <a:solidFill>
                   <a:srgbClr val="000000"/>
                 </a:solidFill>
@@ -32654,7 +32654,7 @@
         </p:nvSpPr>
         <p:spPr>
           <a:xfrm rot="5400000">
-            <a:off x="1811700" y="2737800"/>
+            <a:off x="1811700" y="2953800"/>
             <a:ext cx="86400" cy="79200"/>
           </a:xfrm>
           <a:prstGeom prst="triangle">
@@ -32699,7 +32699,7 @@
         <p:spPr>
           <a:xfrm>
             <a:off x="1908900" y="2358000"/>
-            <a:ext cx="1484100" cy="846000"/>
+            <a:ext cx="1484100" cy="1278000"/>
           </a:xfrm>
           <a:prstGeom prst="roundRect">
             <a:avLst>
@@ -32815,7 +32815,7 @@
         <p:spPr>
           <a:xfrm>
             <a:off x="1944900" y="2646000"/>
-            <a:ext cx="1412100" cy="576000"/>
+            <a:ext cx="1412100" cy="1007999"/>
           </a:xfrm>
           <a:prstGeom prst="rect">
             <a:avLst/>
@@ -32840,7 +32840,7 @@
               </a:spcAft>
             </a:pPr>
             <a:r>
-              <a:rPr sz="1100" b="0">
+              <a:rPr sz="1300" b="0">
                 <a:solidFill>
                   <a:srgbClr val="000000"/>
                 </a:solidFill>
@@ -32861,7 +32861,7 @@
         </p:nvSpPr>
         <p:spPr>
           <a:xfrm rot="5400000">
-            <a:off x="3403800" y="2737800"/>
+            <a:off x="3403800" y="2953800"/>
             <a:ext cx="86400" cy="79200"/>
           </a:xfrm>
           <a:prstGeom prst="triangle">
@@ -32906,7 +32906,7 @@
         <p:spPr>
           <a:xfrm>
             <a:off x="3501000" y="2358000"/>
-            <a:ext cx="1484100" cy="846000"/>
+            <a:ext cx="1484100" cy="1278000"/>
           </a:xfrm>
           <a:prstGeom prst="roundRect">
             <a:avLst>
@@ -33022,7 +33022,7 @@
         <p:spPr>
           <a:xfrm>
             <a:off x="3537000" y="2646000"/>
-            <a:ext cx="1412100" cy="576000"/>
+            <a:ext cx="1412100" cy="1007999"/>
           </a:xfrm>
           <a:prstGeom prst="rect">
             <a:avLst/>
@@ -33047,7 +33047,7 @@
               </a:spcAft>
             </a:pPr>
             <a:r>
-              <a:rPr sz="1100" b="0">
+              <a:rPr sz="1300" b="0">
                 <a:solidFill>
                   <a:srgbClr val="000000"/>
                 </a:solidFill>
@@ -33068,7 +33068,7 @@
         </p:nvSpPr>
         <p:spPr>
           <a:xfrm rot="5400000">
-            <a:off x="4995900" y="2737800"/>
+            <a:off x="4995900" y="2953800"/>
             <a:ext cx="86400" cy="79200"/>
           </a:xfrm>
           <a:prstGeom prst="triangle">
@@ -33113,7 +33113,7 @@
         <p:spPr>
           <a:xfrm>
             <a:off x="5093100" y="2358000"/>
-            <a:ext cx="1484100" cy="846000"/>
+            <a:ext cx="1484100" cy="1278000"/>
           </a:xfrm>
           <a:prstGeom prst="roundRect">
             <a:avLst>
@@ -33229,7 +33229,7 @@
         <p:spPr>
           <a:xfrm>
             <a:off x="5129100" y="2646000"/>
-            <a:ext cx="1412100" cy="576000"/>
+            <a:ext cx="1412100" cy="1007999"/>
           </a:xfrm>
           <a:prstGeom prst="rect">
             <a:avLst/>
@@ -33254,7 +33254,7 @@
               </a:spcAft>
             </a:pPr>
             <a:r>
-              <a:rPr sz="1100" b="0">
+              <a:rPr sz="1300" b="0">
                 <a:solidFill>
                   <a:srgbClr val="000000"/>
                 </a:solidFill>
@@ -33275,8 +33275,8 @@
         </p:nvSpPr>
         <p:spPr>
           <a:xfrm>
-            <a:off x="280800" y="3330000"/>
-            <a:ext cx="6332400" cy="1356480"/>
+            <a:off x="280800" y="3761999"/>
+            <a:ext cx="6332400" cy="1483559"/>
           </a:xfrm>
           <a:prstGeom prst="rect">
             <a:avLst/>
@@ -33319,8 +33319,8 @@
         </p:nvSpPr>
         <p:spPr>
           <a:xfrm>
-            <a:off x="334800" y="3366000"/>
-            <a:ext cx="6224400" cy="1320480"/>
+            <a:off x="334800" y="3797999"/>
+            <a:ext cx="6224400" cy="1447560"/>
           </a:xfrm>
           <a:prstGeom prst="rect">
             <a:avLst/>
@@ -33347,7 +33347,7 @@
               <a:buChar char="•"/>
             </a:pPr>
             <a:r>
-              <a:rPr sz="1200" b="0">
+              <a:rPr sz="1400" b="0">
                 <a:solidFill>
                   <a:srgbClr val="000000"/>
                 </a:solidFill>
@@ -33373,7 +33373,7 @@
               <a:buChar char="•"/>
             </a:pPr>
             <a:r>
-              <a:rPr sz="1200" b="0">
+              <a:rPr sz="1400" b="0">
                 <a:solidFill>
                   <a:srgbClr val="000000"/>
                 </a:solidFill>
@@ -33394,7 +33394,7 @@
         </p:nvSpPr>
         <p:spPr>
           <a:xfrm>
-            <a:off x="302400" y="4790880"/>
+            <a:off x="302400" y="5349959"/>
             <a:ext cx="46800" cy="223200"/>
           </a:xfrm>
           <a:prstGeom prst="rect">
@@ -33438,7 +33438,7 @@
         </p:nvSpPr>
         <p:spPr>
           <a:xfrm>
-            <a:off x="392400" y="4776480"/>
+            <a:off x="392400" y="5335559"/>
             <a:ext cx="6156000" cy="251999"/>
           </a:xfrm>
           <a:prstGeom prst="rect">
@@ -33475,8 +33475,8 @@
           <p:nvPr/>
         </p:nvGraphicFramePr>
         <p:xfrm>
-          <a:off x="316800" y="5100480"/>
-          <a:ext cx="6260400" cy="1009724"/>
+          <a:off x="316800" y="5659559"/>
+          <a:ext cx="6260400" cy="1854000"/>
         </p:xfrm>
         <a:graphic>
           <a:graphicData uri="http://schemas.openxmlformats.org/drawingml/2006/table">
@@ -33486,7 +33486,7 @@
                 <a:gridCol w="1408590"/>
                 <a:gridCol w="4851810"/>
               </a:tblGrid>
-              <a:tr h="325724">
+              <a:tr h="594000">
                 <a:tc>
                   <a:txBody>
                     <a:bodyPr wrap="square"/>
@@ -33504,7 +33504,7 @@
                         </a:spcAft>
                       </a:pPr>
                       <a:r>
-                        <a:rPr sz="1150" b="1">
+                        <a:rPr sz="1350" b="1">
                           <a:solidFill>
                             <a:srgbClr val="FFFFFF"/>
                           </a:solidFill>
@@ -33559,7 +33559,7 @@
                         </a:spcAft>
                       </a:pPr>
                       <a:r>
-                        <a:rPr sz="1150" b="1">
+                        <a:rPr sz="1350" b="1">
                           <a:solidFill>
                             <a:srgbClr val="FFFFFF"/>
                           </a:solidFill>
@@ -33598,7 +33598,7 @@
                   </a:tcPr>
                 </a:tc>
               </a:tr>
-              <a:tr h="342000">
+              <a:tr h="630000">
                 <a:tc>
                   <a:txBody>
                     <a:bodyPr wrap="square"/>
@@ -33616,7 +33616,7 @@
                         </a:spcAft>
                       </a:pPr>
                       <a:r>
-                        <a:rPr sz="1100" b="1">
+                        <a:rPr sz="1300" b="1">
                           <a:solidFill>
                             <a:srgbClr val="222222"/>
                           </a:solidFill>
@@ -33671,7 +33671,7 @@
                         </a:spcAft>
                       </a:pPr>
                       <a:r>
-                        <a:rPr sz="1100" b="0">
+                        <a:rPr sz="1300" b="0">
                           <a:solidFill>
                             <a:srgbClr val="222222"/>
                           </a:solidFill>
@@ -33710,7 +33710,7 @@
                   </a:tcPr>
                 </a:tc>
               </a:tr>
-              <a:tr h="342000">
+              <a:tr h="630000">
                 <a:tc>
                   <a:txBody>
                     <a:bodyPr wrap="square"/>
@@ -33728,7 +33728,7 @@
                         </a:spcAft>
                       </a:pPr>
                       <a:r>
-                        <a:rPr sz="1100" b="1">
+                        <a:rPr sz="1300" b="1">
                           <a:solidFill>
                             <a:srgbClr val="222222"/>
                           </a:solidFill>
@@ -33783,7 +33783,7 @@
                         </a:spcAft>
                       </a:pPr>
                       <a:r>
-                        <a:rPr sz="1100" b="0">
+                        <a:rPr sz="1300" b="0">
                           <a:solidFill>
                             <a:srgbClr val="222222"/>
                           </a:solidFill>
@@ -33834,8 +33834,8 @@
         </p:nvSpPr>
         <p:spPr>
           <a:xfrm>
-            <a:off x="280800" y="6218204"/>
-            <a:ext cx="6332400" cy="342135"/>
+            <a:off x="280800" y="7621560"/>
+            <a:ext cx="6332400" cy="376447"/>
           </a:xfrm>
           <a:prstGeom prst="roundRect">
             <a:avLst>
@@ -33882,7 +33882,7 @@
               </a:spcAft>
             </a:pPr>
             <a:r>
-              <a:rPr sz="1050" b="1">
+              <a:rPr sz="1250" b="1">
                 <a:solidFill>
                   <a:srgbClr val="7F3F00"/>
                 </a:solidFill>
@@ -34723,7 +34723,7 @@
         </p:nvGraphicFramePr>
         <p:xfrm>
           <a:off x="316800" y="2358000"/>
-          <a:ext cx="6260399" cy="2727984"/>
+          <a:ext cx="6260399" cy="3283437"/>
         </p:xfrm>
         <a:graphic>
           <a:graphicData uri="http://schemas.openxmlformats.org/drawingml/2006/table">
@@ -34737,7 +34737,7 @@
                 <a:gridCol w="748098"/>
                 <a:gridCol w="748098"/>
               </a:tblGrid>
-              <a:tr h="333984">
+              <a:tr h="385444">
                 <a:tc>
                   <a:txBody>
                     <a:bodyPr wrap="square"/>
@@ -34755,7 +34755,7 @@
                         </a:spcAft>
                       </a:pPr>
                       <a:r>
-                        <a:rPr sz="1200" b="1">
+                        <a:rPr sz="1250" b="1">
                           <a:solidFill>
                             <a:srgbClr val="FFFFFF"/>
                           </a:solidFill>
@@ -34810,7 +34810,7 @@
                         </a:spcAft>
                       </a:pPr>
                       <a:r>
-                        <a:rPr sz="1200" b="1">
+                        <a:rPr sz="1250" b="1">
                           <a:solidFill>
                             <a:srgbClr val="FFFFFF"/>
                           </a:solidFill>
@@ -34865,7 +34865,7 @@
                         </a:spcAft>
                       </a:pPr>
                       <a:r>
-                        <a:rPr sz="1200" b="1">
+                        <a:rPr sz="1250" b="1">
                           <a:solidFill>
                             <a:srgbClr val="FFFFFF"/>
                           </a:solidFill>
@@ -34920,7 +34920,7 @@
                         </a:spcAft>
                       </a:pPr>
                       <a:r>
-                        <a:rPr sz="1200" b="1">
+                        <a:rPr sz="1250" b="1">
                           <a:solidFill>
                             <a:srgbClr val="FFFFFF"/>
                           </a:solidFill>
@@ -34975,7 +34975,7 @@
                         </a:spcAft>
                       </a:pPr>
                       <a:r>
-                        <a:rPr sz="1200" b="1">
+                        <a:rPr sz="1250" b="1">
                           <a:solidFill>
                             <a:srgbClr val="FFFFFF"/>
                           </a:solidFill>
@@ -35030,7 +35030,7 @@
                         </a:spcAft>
                       </a:pPr>
                       <a:r>
-                        <a:rPr sz="1200" b="1">
+                        <a:rPr sz="1250" b="1">
                           <a:solidFill>
                             <a:srgbClr val="FFFFFF"/>
                           </a:solidFill>
@@ -35069,7 +35069,7 @@
                   </a:tcPr>
                 </a:tc>
               </a:tr>
-              <a:tr h="342000">
+              <a:tr h="413999">
                 <a:tc>
                   <a:txBody>
                     <a:bodyPr wrap="square"/>
@@ -35087,7 +35087,7 @@
                         </a:spcAft>
                       </a:pPr>
                       <a:r>
-                        <a:rPr sz="1150" b="1">
+                        <a:rPr sz="1200" b="1">
                           <a:solidFill>
                             <a:srgbClr val="222222"/>
                           </a:solidFill>
@@ -35142,7 +35142,7 @@
                         </a:spcAft>
                       </a:pPr>
                       <a:r>
-                        <a:rPr sz="1150" b="0">
+                        <a:rPr sz="1200" b="0">
                           <a:solidFill>
                             <a:srgbClr val="222222"/>
                           </a:solidFill>
@@ -35197,7 +35197,7 @@
                         </a:spcAft>
                       </a:pPr>
                       <a:r>
-                        <a:rPr sz="1150" b="0">
+                        <a:rPr sz="1200" b="0">
                           <a:solidFill>
                             <a:srgbClr val="222222"/>
                           </a:solidFill>
@@ -35252,7 +35252,7 @@
                         </a:spcAft>
                       </a:pPr>
                       <a:r>
-                        <a:rPr sz="1150" b="0">
+                        <a:rPr sz="1200" b="0">
                           <a:solidFill>
                             <a:srgbClr val="222222"/>
                           </a:solidFill>
@@ -35307,7 +35307,7 @@
                         </a:spcAft>
                       </a:pPr>
                       <a:r>
-                        <a:rPr sz="1150" b="0">
+                        <a:rPr sz="1200" b="0">
                           <a:solidFill>
                             <a:srgbClr val="222222"/>
                           </a:solidFill>
@@ -35362,7 +35362,7 @@
                         </a:spcAft>
                       </a:pPr>
                       <a:r>
-                        <a:rPr sz="1150" b="0">
+                        <a:rPr sz="1200" b="0">
                           <a:solidFill>
                             <a:srgbClr val="222222"/>
                           </a:solidFill>
@@ -35401,7 +35401,7 @@
                   </a:tcPr>
                 </a:tc>
               </a:tr>
-              <a:tr h="342000">
+              <a:tr h="413999">
                 <a:tc>
                   <a:txBody>
                     <a:bodyPr wrap="square"/>
@@ -35419,7 +35419,7 @@
                         </a:spcAft>
                       </a:pPr>
                       <a:r>
-                        <a:rPr sz="1150" b="1">
+                        <a:rPr sz="1200" b="1">
                           <a:solidFill>
                             <a:srgbClr val="222222"/>
                           </a:solidFill>
@@ -35474,7 +35474,7 @@
                         </a:spcAft>
                       </a:pPr>
                       <a:r>
-                        <a:rPr sz="1150" b="0">
+                        <a:rPr sz="1200" b="0">
                           <a:solidFill>
                             <a:srgbClr val="222222"/>
                           </a:solidFill>
@@ -35689,7 +35689,7 @@
                   </a:tcPr>
                 </a:tc>
               </a:tr>
-              <a:tr h="342000">
+              <a:tr h="413999">
                 <a:tc>
                   <a:txBody>
                     <a:bodyPr wrap="square"/>
@@ -35707,7 +35707,7 @@
                         </a:spcAft>
                       </a:pPr>
                       <a:r>
-                        <a:rPr sz="1150" b="1">
+                        <a:rPr sz="1200" b="1">
                           <a:solidFill>
                             <a:srgbClr val="222222"/>
                           </a:solidFill>
@@ -35762,7 +35762,7 @@
                         </a:spcAft>
                       </a:pPr>
                       <a:r>
-                        <a:rPr sz="1150" b="0">
+                        <a:rPr sz="1200" b="0">
                           <a:solidFill>
                             <a:srgbClr val="222222"/>
                           </a:solidFill>
@@ -35817,7 +35817,7 @@
                         </a:spcAft>
                       </a:pPr>
                       <a:r>
-                        <a:rPr sz="1150" b="0">
+                        <a:rPr sz="1200" b="0">
                           <a:solidFill>
                             <a:srgbClr val="222222"/>
                           </a:solidFill>
@@ -35872,7 +35872,7 @@
                         </a:spcAft>
                       </a:pPr>
                       <a:r>
-                        <a:rPr sz="1150" b="0">
+                        <a:rPr sz="1200" b="0">
                           <a:solidFill>
                             <a:srgbClr val="222222"/>
                           </a:solidFill>
@@ -35999,7 +35999,7 @@
                   </a:tcPr>
                 </a:tc>
               </a:tr>
-              <a:tr h="342000">
+              <a:tr h="413999">
                 <a:tc>
                   <a:txBody>
                     <a:bodyPr wrap="square"/>
@@ -36017,7 +36017,7 @@
                         </a:spcAft>
                       </a:pPr>
                       <a:r>
-                        <a:rPr sz="1150" b="1">
+                        <a:rPr sz="1200" b="1">
                           <a:solidFill>
                             <a:srgbClr val="222222"/>
                           </a:solidFill>
@@ -36116,7 +36116,7 @@
                         </a:spcAft>
                       </a:pPr>
                       <a:r>
-                        <a:rPr sz="1150" b="0">
+                        <a:rPr sz="1200" b="0">
                           <a:solidFill>
                             <a:srgbClr val="222222"/>
                           </a:solidFill>
@@ -36171,7 +36171,7 @@
                         </a:spcAft>
                       </a:pPr>
                       <a:r>
-                        <a:rPr sz="1150" b="0">
+                        <a:rPr sz="1200" b="0">
                           <a:solidFill>
                             <a:srgbClr val="222222"/>
                           </a:solidFill>
@@ -36298,7 +36298,7 @@
                   </a:tcPr>
                 </a:tc>
               </a:tr>
-              <a:tr h="342000">
+              <a:tr h="413999">
                 <a:tc>
                   <a:txBody>
                     <a:bodyPr wrap="square"/>
@@ -36316,7 +36316,7 @@
                         </a:spcAft>
                       </a:pPr>
                       <a:r>
-                        <a:rPr sz="1150" b="1">
+                        <a:rPr sz="1200" b="1">
                           <a:solidFill>
                             <a:srgbClr val="222222"/>
                           </a:solidFill>
@@ -36415,7 +36415,7 @@
                         </a:spcAft>
                       </a:pPr>
                       <a:r>
-                        <a:rPr sz="1150" b="0">
+                        <a:rPr sz="1200" b="0">
                           <a:solidFill>
                             <a:srgbClr val="222222"/>
                           </a:solidFill>
@@ -36470,7 +36470,7 @@
                         </a:spcAft>
                       </a:pPr>
                       <a:r>
-                        <a:rPr sz="1150" b="0">
+                        <a:rPr sz="1200" b="0">
                           <a:solidFill>
                             <a:srgbClr val="222222"/>
                           </a:solidFill>
@@ -36525,7 +36525,7 @@
                         </a:spcAft>
                       </a:pPr>
                       <a:r>
-                        <a:rPr sz="1150" b="0">
+                        <a:rPr sz="1200" b="0">
                           <a:solidFill>
                             <a:srgbClr val="222222"/>
                           </a:solidFill>
@@ -36608,7 +36608,7 @@
                   </a:tcPr>
                 </a:tc>
               </a:tr>
-              <a:tr h="342000">
+              <a:tr h="413999">
                 <a:tc>
                   <a:txBody>
                     <a:bodyPr wrap="square"/>
@@ -36626,7 +36626,7 @@
                         </a:spcAft>
                       </a:pPr>
                       <a:r>
-                        <a:rPr sz="1150" b="1">
+                        <a:rPr sz="1200" b="1">
                           <a:solidFill>
                             <a:srgbClr val="222222"/>
                           </a:solidFill>
@@ -36813,7 +36813,7 @@
                         </a:spcAft>
                       </a:pPr>
                       <a:r>
-                        <a:rPr sz="1150" b="0">
+                        <a:rPr sz="1200" b="0">
                           <a:solidFill>
                             <a:srgbClr val="222222"/>
                           </a:solidFill>
@@ -36868,7 +36868,7 @@
                         </a:spcAft>
                       </a:pPr>
                       <a:r>
-                        <a:rPr sz="1150" b="0">
+                        <a:rPr sz="1200" b="0">
                           <a:solidFill>
                             <a:srgbClr val="222222"/>
                           </a:solidFill>
@@ -36907,7 +36907,7 @@
                   </a:tcPr>
                 </a:tc>
               </a:tr>
-              <a:tr h="342000">
+              <a:tr h="413999">
                 <a:tc>
                   <a:txBody>
                     <a:bodyPr wrap="square"/>
@@ -36925,7 +36925,7 @@
                         </a:spcAft>
                       </a:pPr>
                       <a:r>
-                        <a:rPr sz="1150" b="1">
+                        <a:rPr sz="1200" b="1">
                           <a:solidFill>
                             <a:srgbClr val="222222"/>
                           </a:solidFill>
@@ -37156,7 +37156,7 @@
                         </a:spcAft>
                       </a:pPr>
                       <a:r>
-                        <a:rPr sz="1150" b="0">
+                        <a:rPr sz="1200" b="0">
                           <a:solidFill>
                             <a:srgbClr val="222222"/>
                           </a:solidFill>
@@ -37207,8 +37207,8 @@
         </p:nvSpPr>
         <p:spPr>
           <a:xfrm>
-            <a:off x="280800" y="5193984"/>
-            <a:ext cx="6332400" cy="741239"/>
+            <a:off x="280800" y="5749444"/>
+            <a:ext cx="6332400" cy="757125"/>
           </a:xfrm>
           <a:prstGeom prst="rect">
             <a:avLst/>
@@ -37251,8 +37251,8 @@
         </p:nvSpPr>
         <p:spPr>
           <a:xfrm>
-            <a:off x="334800" y="5229984"/>
-            <a:ext cx="6224400" cy="705240"/>
+            <a:off x="334800" y="5785444"/>
+            <a:ext cx="6224400" cy="721124"/>
           </a:xfrm>
           <a:prstGeom prst="rect">
             <a:avLst/>
@@ -37279,7 +37279,7 @@
               <a:buChar char="•"/>
             </a:pPr>
             <a:r>
-              <a:rPr sz="1200" b="0">
+              <a:rPr sz="1250" b="0">
                 <a:solidFill>
                   <a:srgbClr val="000000"/>
                 </a:solidFill>
@@ -37300,7 +37300,7 @@
         </p:nvSpPr>
         <p:spPr>
           <a:xfrm>
-            <a:off x="302400" y="6039624"/>
+            <a:off x="302400" y="6610969"/>
             <a:ext cx="46800" cy="223200"/>
           </a:xfrm>
           <a:prstGeom prst="rect">
@@ -37344,7 +37344,7 @@
         </p:nvSpPr>
         <p:spPr>
           <a:xfrm>
-            <a:off x="392400" y="6025224"/>
+            <a:off x="392400" y="6596569"/>
             <a:ext cx="6156000" cy="251999"/>
           </a:xfrm>
           <a:prstGeom prst="rect">
@@ -37381,8 +37381,8 @@
           <p:nvPr/>
         </p:nvGraphicFramePr>
         <p:xfrm>
-          <a:off x="316800" y="6349224"/>
-          <a:ext cx="6260400" cy="1009724"/>
+          <a:off x="316800" y="6920569"/>
+          <a:ext cx="6260400" cy="1205998"/>
         </p:xfrm>
         <a:graphic>
           <a:graphicData uri="http://schemas.openxmlformats.org/drawingml/2006/table">
@@ -37392,7 +37392,7 @@
                 <a:gridCol w="1408590"/>
                 <a:gridCol w="4851810"/>
               </a:tblGrid>
-              <a:tr h="325724">
+              <a:tr h="378000">
                 <a:tc>
                   <a:txBody>
                     <a:bodyPr wrap="square"/>
@@ -37410,7 +37410,7 @@
                         </a:spcAft>
                       </a:pPr>
                       <a:r>
-                        <a:rPr sz="1150" b="1">
+                        <a:rPr sz="1200" b="1">
                           <a:solidFill>
                             <a:srgbClr val="FFFFFF"/>
                           </a:solidFill>
@@ -37465,7 +37465,7 @@
                         </a:spcAft>
                       </a:pPr>
                       <a:r>
-                        <a:rPr sz="1150" b="1">
+                        <a:rPr sz="1200" b="1">
                           <a:solidFill>
                             <a:srgbClr val="FFFFFF"/>
                           </a:solidFill>
@@ -37504,7 +37504,7 @@
                   </a:tcPr>
                 </a:tc>
               </a:tr>
-              <a:tr h="342000">
+              <a:tr h="413999">
                 <a:tc>
                   <a:txBody>
                     <a:bodyPr wrap="square"/>
@@ -37522,7 +37522,7 @@
                         </a:spcAft>
                       </a:pPr>
                       <a:r>
-                        <a:rPr sz="1100" b="1">
+                        <a:rPr sz="1150" b="1">
                           <a:solidFill>
                             <a:srgbClr val="222222"/>
                           </a:solidFill>
@@ -37577,7 +37577,7 @@
                         </a:spcAft>
                       </a:pPr>
                       <a:r>
-                        <a:rPr sz="1100" b="0">
+                        <a:rPr sz="1150" b="0">
                           <a:solidFill>
                             <a:srgbClr val="222222"/>
                           </a:solidFill>
@@ -37616,7 +37616,7 @@
                   </a:tcPr>
                 </a:tc>
               </a:tr>
-              <a:tr h="342000">
+              <a:tr h="413999">
                 <a:tc>
                   <a:txBody>
                     <a:bodyPr wrap="square"/>
@@ -37634,7 +37634,7 @@
                         </a:spcAft>
                       </a:pPr>
                       <a:r>
-                        <a:rPr sz="1100" b="1">
+                        <a:rPr sz="1150" b="1">
                           <a:solidFill>
                             <a:srgbClr val="222222"/>
                           </a:solidFill>
@@ -37689,7 +37689,7 @@
                         </a:spcAft>
                       </a:pPr>
                       <a:r>
-                        <a:rPr sz="1100" b="0">
+                        <a:rPr sz="1150" b="0">
                           <a:solidFill>
                             <a:srgbClr val="222222"/>
                           </a:solidFill>
@@ -37740,8 +37740,8 @@
         </p:nvSpPr>
         <p:spPr>
           <a:xfrm>
-            <a:off x="280800" y="7466948"/>
-            <a:ext cx="6332400" cy="342135"/>
+            <a:off x="280800" y="8234569"/>
+            <a:ext cx="6332400" cy="350713"/>
           </a:xfrm>
           <a:prstGeom prst="roundRect">
             <a:avLst>
@@ -37788,7 +37788,7 @@
               </a:spcAft>
             </a:pPr>
             <a:r>
-              <a:rPr sz="1050" b="1">
+              <a:rPr sz="1100" b="1">
                 <a:solidFill>
                   <a:srgbClr val="7F3F00"/>
                 </a:solidFill>
@@ -38310,7 +38310,7 @@
         </p:nvGraphicFramePr>
         <p:xfrm>
           <a:off x="316800" y="2358000"/>
-          <a:ext cx="6260400" cy="2407922"/>
+          <a:ext cx="6260400" cy="3667045"/>
         </p:xfrm>
         <a:graphic>
           <a:graphicData uri="http://schemas.openxmlformats.org/drawingml/2006/table">
@@ -38320,7 +38320,7 @@
                 <a:gridCol w="1330335"/>
                 <a:gridCol w="4930065"/>
               </a:tblGrid>
-              <a:tr h="333984">
+              <a:tr h="450000">
                 <a:tc>
                   <a:txBody>
                     <a:bodyPr wrap="square"/>
@@ -38338,7 +38338,7 @@
                         </a:spcAft>
                       </a:pPr>
                       <a:r>
-                        <a:rPr sz="1200" b="1">
+                        <a:rPr sz="1300" b="1">
                           <a:solidFill>
                             <a:srgbClr val="FFFFFF"/>
                           </a:solidFill>
@@ -38393,7 +38393,7 @@
                         </a:spcAft>
                       </a:pPr>
                       <a:r>
-                        <a:rPr sz="1200" b="1">
+                        <a:rPr sz="1300" b="1">
                           <a:solidFill>
                             <a:srgbClr val="FFFFFF"/>
                           </a:solidFill>
@@ -38432,7 +38432,7 @@
                   </a:tcPr>
                 </a:tc>
               </a:tr>
-              <a:tr h="523969">
+              <a:tr h="643409">
                 <a:tc>
                   <a:txBody>
                     <a:bodyPr wrap="square"/>
@@ -38450,7 +38450,7 @@
                         </a:spcAft>
                       </a:pPr>
                       <a:r>
-                        <a:rPr sz="1150" b="1">
+                        <a:rPr sz="1250" b="1">
                           <a:solidFill>
                             <a:srgbClr val="222222"/>
                           </a:solidFill>
@@ -38505,7 +38505,7 @@
                         </a:spcAft>
                       </a:pPr>
                       <a:r>
-                        <a:rPr sz="1150" b="0">
+                        <a:rPr sz="1250" b="0">
                           <a:solidFill>
                             <a:srgbClr val="222222"/>
                           </a:solidFill>
@@ -38544,7 +38544,7 @@
                   </a:tcPr>
                 </a:tc>
               </a:tr>
-              <a:tr h="523969">
+              <a:tr h="643409">
                 <a:tc>
                   <a:txBody>
                     <a:bodyPr wrap="square"/>
@@ -38562,7 +38562,7 @@
                         </a:spcAft>
                       </a:pPr>
                       <a:r>
-                        <a:rPr sz="1150" b="1">
+                        <a:rPr sz="1250" b="1">
                           <a:solidFill>
                             <a:srgbClr val="222222"/>
                           </a:solidFill>
@@ -38617,7 +38617,7 @@
                         </a:spcAft>
                       </a:pPr>
                       <a:r>
-                        <a:rPr sz="1150" b="0">
+                        <a:rPr sz="1250" b="0">
                           <a:solidFill>
                             <a:srgbClr val="222222"/>
                           </a:solidFill>
@@ -38656,7 +38656,7 @@
                   </a:tcPr>
                 </a:tc>
               </a:tr>
-              <a:tr h="342000">
+              <a:tr h="643409">
                 <a:tc>
                   <a:txBody>
                     <a:bodyPr wrap="square"/>
@@ -38674,7 +38674,7 @@
                         </a:spcAft>
                       </a:pPr>
                       <a:r>
-                        <a:rPr sz="1150" b="1">
+                        <a:rPr sz="1250" b="1">
                           <a:solidFill>
                             <a:srgbClr val="222222"/>
                           </a:solidFill>
@@ -38729,7 +38729,7 @@
                         </a:spcAft>
                       </a:pPr>
                       <a:r>
-                        <a:rPr sz="1150" b="0">
+                        <a:rPr sz="1250" b="0">
                           <a:solidFill>
                             <a:srgbClr val="222222"/>
                           </a:solidFill>
@@ -38768,7 +38768,7 @@
                   </a:tcPr>
                 </a:tc>
               </a:tr>
-              <a:tr h="342000">
+              <a:tr h="643409">
                 <a:tc>
                   <a:txBody>
                     <a:bodyPr wrap="square"/>
@@ -38786,7 +38786,7 @@
                         </a:spcAft>
                       </a:pPr>
                       <a:r>
-                        <a:rPr sz="1150" b="1">
+                        <a:rPr sz="1250" b="1">
                           <a:solidFill>
                             <a:srgbClr val="222222"/>
                           </a:solidFill>
@@ -38841,7 +38841,7 @@
                         </a:spcAft>
                       </a:pPr>
                       <a:r>
-                        <a:rPr sz="1150" b="0">
+                        <a:rPr sz="1250" b="0">
                           <a:solidFill>
                             <a:srgbClr val="222222"/>
                           </a:solidFill>
@@ -38880,7 +38880,7 @@
                   </a:tcPr>
                 </a:tc>
               </a:tr>
-              <a:tr h="342000">
+              <a:tr h="643409">
                 <a:tc>
                   <a:txBody>
                     <a:bodyPr wrap="square"/>
@@ -38898,7 +38898,7 @@
                         </a:spcAft>
                       </a:pPr>
                       <a:r>
-                        <a:rPr sz="1150" b="1">
+                        <a:rPr sz="1250" b="1">
                           <a:solidFill>
                             <a:srgbClr val="222222"/>
                           </a:solidFill>
@@ -38953,7 +38953,7 @@
                         </a:spcAft>
                       </a:pPr>
                       <a:r>
-                        <a:rPr sz="1150" b="0">
+                        <a:rPr sz="1250" b="0">
                           <a:solidFill>
                             <a:srgbClr val="222222"/>
                           </a:solidFill>
@@ -39004,7 +39004,7 @@
         </p:nvSpPr>
         <p:spPr>
           <a:xfrm>
-            <a:off x="302400" y="4888323"/>
+            <a:off x="302400" y="6147449"/>
             <a:ext cx="46800" cy="223200"/>
           </a:xfrm>
           <a:prstGeom prst="rect">
@@ -39048,7 +39048,7 @@
         </p:nvSpPr>
         <p:spPr>
           <a:xfrm>
-            <a:off x="392400" y="4873923"/>
+            <a:off x="392400" y="6133050"/>
             <a:ext cx="6156000" cy="251999"/>
           </a:xfrm>
           <a:prstGeom prst="rect">
@@ -39085,8 +39085,8 @@
           <p:nvPr/>
         </p:nvGraphicFramePr>
         <p:xfrm>
-          <a:off x="316800" y="5197923"/>
-          <a:ext cx="6260400" cy="1351724"/>
+          <a:off x="316800" y="6457049"/>
+          <a:ext cx="6260400" cy="1908000"/>
         </p:xfrm>
         <a:graphic>
           <a:graphicData uri="http://schemas.openxmlformats.org/drawingml/2006/table">
@@ -39096,7 +39096,7 @@
                 <a:gridCol w="1408590"/>
                 <a:gridCol w="4851810"/>
               </a:tblGrid>
-              <a:tr h="325724">
+              <a:tr h="450000">
                 <a:tc>
                   <a:txBody>
                     <a:bodyPr wrap="square"/>
@@ -39114,7 +39114,7 @@
                         </a:spcAft>
                       </a:pPr>
                       <a:r>
-                        <a:rPr sz="1150" b="1">
+                        <a:rPr sz="1250" b="1">
                           <a:solidFill>
                             <a:srgbClr val="FFFFFF"/>
                           </a:solidFill>
@@ -39169,7 +39169,7 @@
                         </a:spcAft>
                       </a:pPr>
                       <a:r>
-                        <a:rPr sz="1150" b="1">
+                        <a:rPr sz="1250" b="1">
                           <a:solidFill>
                             <a:srgbClr val="FFFFFF"/>
                           </a:solidFill>
@@ -39208,7 +39208,7 @@
                   </a:tcPr>
                 </a:tc>
               </a:tr>
-              <a:tr h="342000">
+              <a:tr h="486000">
                 <a:tc>
                   <a:txBody>
                     <a:bodyPr wrap="square"/>
@@ -39226,7 +39226,7 @@
                         </a:spcAft>
                       </a:pPr>
                       <a:r>
-                        <a:rPr sz="1100" b="1">
+                        <a:rPr sz="1200" b="1">
                           <a:solidFill>
                             <a:srgbClr val="222222"/>
                           </a:solidFill>
@@ -39281,7 +39281,7 @@
                         </a:spcAft>
                       </a:pPr>
                       <a:r>
-                        <a:rPr sz="1100" b="0">
+                        <a:rPr sz="1200" b="0">
                           <a:solidFill>
                             <a:srgbClr val="222222"/>
                           </a:solidFill>
@@ -39320,7 +39320,7 @@
                   </a:tcPr>
                 </a:tc>
               </a:tr>
-              <a:tr h="342000">
+              <a:tr h="486000">
                 <a:tc>
                   <a:txBody>
                     <a:bodyPr wrap="square"/>
@@ -39338,7 +39338,7 @@
                         </a:spcAft>
                       </a:pPr>
                       <a:r>
-                        <a:rPr sz="1100" b="1">
+                        <a:rPr sz="1200" b="1">
                           <a:solidFill>
                             <a:srgbClr val="222222"/>
                           </a:solidFill>
@@ -39393,7 +39393,7 @@
                         </a:spcAft>
                       </a:pPr>
                       <a:r>
-                        <a:rPr sz="1100" b="0">
+                        <a:rPr sz="1200" b="0">
                           <a:solidFill>
                             <a:srgbClr val="222222"/>
                           </a:solidFill>
@@ -39432,7 +39432,7 @@
                   </a:tcPr>
                 </a:tc>
               </a:tr>
-              <a:tr h="342000">
+              <a:tr h="486000">
                 <a:tc>
                   <a:txBody>
                     <a:bodyPr wrap="square"/>
@@ -39450,7 +39450,7 @@
                         </a:spcAft>
                       </a:pPr>
                       <a:r>
-                        <a:rPr sz="1100" b="1">
+                        <a:rPr sz="1200" b="1">
                           <a:solidFill>
                             <a:srgbClr val="222222"/>
                           </a:solidFill>
@@ -39505,7 +39505,7 @@
                         </a:spcAft>
                       </a:pPr>
                       <a:r>
-                        <a:rPr sz="1100" b="0">
+                        <a:rPr sz="1200" b="0">
                           <a:solidFill>
                             <a:srgbClr val="222222"/>
                           </a:solidFill>
@@ -39556,8 +39556,8 @@
         </p:nvSpPr>
         <p:spPr>
           <a:xfrm>
-            <a:off x="280800" y="6657647"/>
-            <a:ext cx="6332400" cy="342135"/>
+            <a:off x="280800" y="8473050"/>
+            <a:ext cx="6332400" cy="359291"/>
           </a:xfrm>
           <a:prstGeom prst="roundRect">
             <a:avLst>
@@ -39604,7 +39604,7 @@
               </a:spcAft>
             </a:pPr>
             <a:r>
-              <a:rPr sz="1050" b="1">
+              <a:rPr sz="1150" b="1">
                 <a:solidFill>
                   <a:srgbClr val="7F3F00"/>
                 </a:solidFill>
@@ -40427,7 +40427,7 @@
         <p:spPr>
           <a:xfrm>
             <a:off x="316800" y="2358000"/>
-            <a:ext cx="3085200" cy="977173"/>
+            <a:ext cx="3085200" cy="1332000"/>
           </a:xfrm>
           <a:prstGeom prst="rect">
             <a:avLst/>
@@ -40538,7 +40538,7 @@
         <p:spPr>
           <a:xfrm>
             <a:off x="352800" y="2617200"/>
-            <a:ext cx="3013200" cy="725173"/>
+            <a:ext cx="3013200" cy="1080000"/>
           </a:xfrm>
           <a:prstGeom prst="rect">
             <a:avLst/>
@@ -40565,7 +40565,7 @@
               <a:buChar char="•"/>
             </a:pPr>
             <a:r>
-              <a:rPr sz="1100" b="0">
+              <a:rPr sz="1300" b="0">
                 <a:solidFill>
                   <a:srgbClr val="000000"/>
                 </a:solidFill>
@@ -40591,7 +40591,7 @@
               <a:buChar char="•"/>
             </a:pPr>
             <a:r>
-              <a:rPr sz="1100" b="0">
+              <a:rPr sz="1300" b="0">
                 <a:solidFill>
                   <a:srgbClr val="000000"/>
                 </a:solidFill>
@@ -40617,7 +40617,7 @@
               <a:buChar char="•"/>
             </a:pPr>
             <a:r>
-              <a:rPr sz="1100" b="0">
+              <a:rPr sz="1300" b="0">
                 <a:solidFill>
                   <a:srgbClr val="000000"/>
                 </a:solidFill>
@@ -40639,7 +40639,7 @@
         <p:spPr>
           <a:xfrm>
             <a:off x="3492000" y="2358000"/>
-            <a:ext cx="3085200" cy="977173"/>
+            <a:ext cx="3085200" cy="1332000"/>
           </a:xfrm>
           <a:prstGeom prst="rect">
             <a:avLst/>
@@ -40750,7 +40750,7 @@
         <p:spPr>
           <a:xfrm>
             <a:off x="3528000" y="2617200"/>
-            <a:ext cx="3013200" cy="725173"/>
+            <a:ext cx="3013200" cy="1080000"/>
           </a:xfrm>
           <a:prstGeom prst="rect">
             <a:avLst/>
@@ -40777,7 +40777,7 @@
               <a:buChar char="•"/>
             </a:pPr>
             <a:r>
-              <a:rPr sz="1100" b="0">
+              <a:rPr sz="1300" b="0">
                 <a:solidFill>
                   <a:srgbClr val="000000"/>
                 </a:solidFill>
@@ -40803,7 +40803,7 @@
               <a:buChar char="•"/>
             </a:pPr>
             <a:r>
-              <a:rPr sz="1100" b="0">
+              <a:rPr sz="1300" b="0">
                 <a:solidFill>
                   <a:srgbClr val="000000"/>
                 </a:solidFill>
@@ -40829,7 +40829,7 @@
               <a:buChar char="•"/>
             </a:pPr>
             <a:r>
-              <a:rPr sz="1100" b="0">
+              <a:rPr sz="1300" b="0">
                 <a:solidFill>
                   <a:srgbClr val="000000"/>
                 </a:solidFill>
@@ -40850,8 +40850,8 @@
         </p:nvSpPr>
         <p:spPr>
           <a:xfrm>
-            <a:off x="316800" y="3425173"/>
-            <a:ext cx="3085200" cy="977173"/>
+            <a:off x="316800" y="3780000"/>
+            <a:ext cx="3085200" cy="1332000"/>
           </a:xfrm>
           <a:prstGeom prst="rect">
             <a:avLst/>
@@ -40896,7 +40896,7 @@
         </p:nvSpPr>
         <p:spPr>
           <a:xfrm>
-            <a:off x="316800" y="3425173"/>
+            <a:off x="316800" y="3780000"/>
             <a:ext cx="3085200" cy="234000"/>
           </a:xfrm>
           <a:prstGeom prst="rect">
@@ -40961,8 +40961,8 @@
         </p:nvSpPr>
         <p:spPr>
           <a:xfrm>
-            <a:off x="352800" y="3684373"/>
-            <a:ext cx="3013200" cy="725173"/>
+            <a:off x="352800" y="4039200"/>
+            <a:ext cx="3013200" cy="1080000"/>
           </a:xfrm>
           <a:prstGeom prst="rect">
             <a:avLst/>
@@ -40989,7 +40989,7 @@
               <a:buChar char="•"/>
             </a:pPr>
             <a:r>
-              <a:rPr sz="1100" b="0">
+              <a:rPr sz="1300" b="0">
                 <a:solidFill>
                   <a:srgbClr val="000000"/>
                 </a:solidFill>
@@ -41015,7 +41015,7 @@
               <a:buChar char="•"/>
             </a:pPr>
             <a:r>
-              <a:rPr sz="1100" b="0">
+              <a:rPr sz="1300" b="0">
                 <a:solidFill>
                   <a:srgbClr val="000000"/>
                 </a:solidFill>
@@ -41041,7 +41041,7 @@
               <a:buChar char="•"/>
             </a:pPr>
             <a:r>
-              <a:rPr sz="1100" b="0">
+              <a:rPr sz="1300" b="0">
                 <a:solidFill>
                   <a:srgbClr val="000000"/>
                 </a:solidFill>
@@ -41062,8 +41062,8 @@
         </p:nvSpPr>
         <p:spPr>
           <a:xfrm>
-            <a:off x="3492000" y="3425173"/>
-            <a:ext cx="3085200" cy="977173"/>
+            <a:off x="3492000" y="3780000"/>
+            <a:ext cx="3085200" cy="1332000"/>
           </a:xfrm>
           <a:prstGeom prst="rect">
             <a:avLst/>
@@ -41108,7 +41108,7 @@
         </p:nvSpPr>
         <p:spPr>
           <a:xfrm>
-            <a:off x="3492000" y="3425173"/>
+            <a:off x="3492000" y="3780000"/>
             <a:ext cx="3085200" cy="234000"/>
           </a:xfrm>
           <a:prstGeom prst="rect">
@@ -41173,8 +41173,8 @@
         </p:nvSpPr>
         <p:spPr>
           <a:xfrm>
-            <a:off x="3528000" y="3684373"/>
-            <a:ext cx="3013200" cy="725173"/>
+            <a:off x="3528000" y="4039200"/>
+            <a:ext cx="3013200" cy="1080000"/>
           </a:xfrm>
           <a:prstGeom prst="rect">
             <a:avLst/>
@@ -41201,7 +41201,7 @@
               <a:buChar char="•"/>
             </a:pPr>
             <a:r>
-              <a:rPr sz="1100" b="0">
+              <a:rPr sz="1300" b="0">
                 <a:solidFill>
                   <a:srgbClr val="000000"/>
                 </a:solidFill>
@@ -41227,7 +41227,7 @@
               <a:buChar char="•"/>
             </a:pPr>
             <a:r>
-              <a:rPr sz="1100" b="0">
+              <a:rPr sz="1300" b="0">
                 <a:solidFill>
                   <a:srgbClr val="000000"/>
                 </a:solidFill>
@@ -41253,7 +41253,7 @@
               <a:buChar char="•"/>
             </a:pPr>
             <a:r>
-              <a:rPr sz="1100" b="0">
+              <a:rPr sz="1300" b="0">
                 <a:solidFill>
                   <a:srgbClr val="000000"/>
                 </a:solidFill>
@@ -41274,7 +41274,7 @@
         </p:nvSpPr>
         <p:spPr>
           <a:xfrm>
-            <a:off x="302400" y="4560746"/>
+            <a:off x="302400" y="5270400"/>
             <a:ext cx="46800" cy="223200"/>
           </a:xfrm>
           <a:prstGeom prst="rect">
@@ -41318,7 +41318,7 @@
         </p:nvSpPr>
         <p:spPr>
           <a:xfrm>
-            <a:off x="392400" y="4546346"/>
+            <a:off x="392400" y="5256000"/>
             <a:ext cx="6156000" cy="251999"/>
           </a:xfrm>
           <a:prstGeom prst="rect">
@@ -41355,8 +41355,8 @@
           <p:nvPr/>
         </p:nvGraphicFramePr>
         <p:xfrm>
-          <a:off x="316800" y="4870346"/>
-          <a:ext cx="6260400" cy="1351724"/>
+          <a:off x="316800" y="5580000"/>
+          <a:ext cx="6260400" cy="2484000"/>
         </p:xfrm>
         <a:graphic>
           <a:graphicData uri="http://schemas.openxmlformats.org/drawingml/2006/table">
@@ -41366,7 +41366,7 @@
                 <a:gridCol w="1408590"/>
                 <a:gridCol w="4851810"/>
               </a:tblGrid>
-              <a:tr h="325724">
+              <a:tr h="594000">
                 <a:tc>
                   <a:txBody>
                     <a:bodyPr wrap="square"/>
@@ -41384,7 +41384,7 @@
                         </a:spcAft>
                       </a:pPr>
                       <a:r>
-                        <a:rPr sz="1150" b="1">
+                        <a:rPr sz="1350" b="1">
                           <a:solidFill>
                             <a:srgbClr val="FFFFFF"/>
                           </a:solidFill>
@@ -41439,7 +41439,7 @@
                         </a:spcAft>
                       </a:pPr>
                       <a:r>
-                        <a:rPr sz="1150" b="1">
+                        <a:rPr sz="1350" b="1">
                           <a:solidFill>
                             <a:srgbClr val="FFFFFF"/>
                           </a:solidFill>
@@ -41478,7 +41478,7 @@
                   </a:tcPr>
                 </a:tc>
               </a:tr>
-              <a:tr h="342000">
+              <a:tr h="630000">
                 <a:tc>
                   <a:txBody>
                     <a:bodyPr wrap="square"/>
@@ -41496,7 +41496,7 @@
                         </a:spcAft>
                       </a:pPr>
                       <a:r>
-                        <a:rPr sz="1100" b="1">
+                        <a:rPr sz="1300" b="1">
                           <a:solidFill>
                             <a:srgbClr val="222222"/>
                           </a:solidFill>
@@ -41551,7 +41551,7 @@
                         </a:spcAft>
                       </a:pPr>
                       <a:r>
-                        <a:rPr sz="1100" b="0">
+                        <a:rPr sz="1300" b="0">
                           <a:solidFill>
                             <a:srgbClr val="222222"/>
                           </a:solidFill>
@@ -41590,7 +41590,7 @@
                   </a:tcPr>
                 </a:tc>
               </a:tr>
-              <a:tr h="342000">
+              <a:tr h="630000">
                 <a:tc>
                   <a:txBody>
                     <a:bodyPr wrap="square"/>
@@ -41608,7 +41608,7 @@
                         </a:spcAft>
                       </a:pPr>
                       <a:r>
-                        <a:rPr sz="1100" b="1">
+                        <a:rPr sz="1300" b="1">
                           <a:solidFill>
                             <a:srgbClr val="222222"/>
                           </a:solidFill>
@@ -41663,7 +41663,7 @@
                         </a:spcAft>
                       </a:pPr>
                       <a:r>
-                        <a:rPr sz="1100" b="0">
+                        <a:rPr sz="1300" b="0">
                           <a:solidFill>
                             <a:srgbClr val="222222"/>
                           </a:solidFill>
@@ -41702,7 +41702,7 @@
                   </a:tcPr>
                 </a:tc>
               </a:tr>
-              <a:tr h="342000">
+              <a:tr h="630000">
                 <a:tc>
                   <a:txBody>
                     <a:bodyPr wrap="square"/>
@@ -41720,7 +41720,7 @@
                         </a:spcAft>
                       </a:pPr>
                       <a:r>
-                        <a:rPr sz="1100" b="1">
+                        <a:rPr sz="1300" b="1">
                           <a:solidFill>
                             <a:srgbClr val="222222"/>
                           </a:solidFill>
@@ -41775,7 +41775,7 @@
                         </a:spcAft>
                       </a:pPr>
                       <a:r>
-                        <a:rPr sz="1100" b="0">
+                        <a:rPr sz="1300" b="0">
                           <a:solidFill>
                             <a:srgbClr val="222222"/>
                           </a:solidFill>
@@ -41826,8 +41826,8 @@
         </p:nvSpPr>
         <p:spPr>
           <a:xfrm>
-            <a:off x="280800" y="6330070"/>
-            <a:ext cx="6332400" cy="342135"/>
+            <a:off x="280800" y="8172000"/>
+            <a:ext cx="6332400" cy="590895"/>
           </a:xfrm>
           <a:prstGeom prst="roundRect">
             <a:avLst>
@@ -41874,7 +41874,7 @@
               </a:spcAft>
             </a:pPr>
             <a:r>
-              <a:rPr sz="1050" b="1">
+              <a:rPr sz="1250" b="1">
                 <a:solidFill>
                   <a:srgbClr val="7F3F00"/>
                 </a:solidFill>
@@ -44951,7 +44951,7 @@
         </p:nvGraphicFramePr>
         <p:xfrm>
           <a:off x="316800" y="2358000"/>
-          <a:ext cx="6260400" cy="1701984"/>
+          <a:ext cx="6260400" cy="2211130"/>
         </p:xfrm>
         <a:graphic>
           <a:graphicData uri="http://schemas.openxmlformats.org/drawingml/2006/table">
@@ -44961,7 +44961,7 @@
                 <a:gridCol w="1330335"/>
                 <a:gridCol w="4930065"/>
               </a:tblGrid>
-              <a:tr h="333984">
+              <a:tr h="385444">
                 <a:tc>
                   <a:txBody>
                     <a:bodyPr wrap="square"/>
@@ -44979,7 +44979,7 @@
                         </a:spcAft>
                       </a:pPr>
                       <a:r>
-                        <a:rPr sz="1200" b="1">
+                        <a:rPr sz="1250" b="1">
                           <a:solidFill>
                             <a:srgbClr val="FFFFFF"/>
                           </a:solidFill>
@@ -45034,7 +45034,7 @@
                         </a:spcAft>
                       </a:pPr>
                       <a:r>
-                        <a:rPr sz="1200" b="1">
+                        <a:rPr sz="1250" b="1">
                           <a:solidFill>
                             <a:srgbClr val="FFFFFF"/>
                           </a:solidFill>
@@ -45073,7 +45073,7 @@
                   </a:tcPr>
                 </a:tc>
               </a:tr>
-              <a:tr h="342000">
+              <a:tr h="413999">
                 <a:tc>
                   <a:txBody>
                     <a:bodyPr wrap="square"/>
@@ -45091,7 +45091,7 @@
                         </a:spcAft>
                       </a:pPr>
                       <a:r>
-                        <a:rPr sz="1150" b="1">
+                        <a:rPr sz="1200" b="1">
                           <a:solidFill>
                             <a:srgbClr val="222222"/>
                           </a:solidFill>
@@ -45146,7 +45146,7 @@
                         </a:spcAft>
                       </a:pPr>
                       <a:r>
-                        <a:rPr sz="1150" b="0">
+                        <a:rPr sz="1200" b="0">
                           <a:solidFill>
                             <a:srgbClr val="222222"/>
                           </a:solidFill>
@@ -45185,7 +45185,7 @@
                   </a:tcPr>
                 </a:tc>
               </a:tr>
-              <a:tr h="342000">
+              <a:tr h="413999">
                 <a:tc>
                   <a:txBody>
                     <a:bodyPr wrap="square"/>
@@ -45203,7 +45203,7 @@
                         </a:spcAft>
                       </a:pPr>
                       <a:r>
-                        <a:rPr sz="1150" b="1">
+                        <a:rPr sz="1200" b="1">
                           <a:solidFill>
                             <a:srgbClr val="222222"/>
                           </a:solidFill>
@@ -45258,7 +45258,7 @@
                         </a:spcAft>
                       </a:pPr>
                       <a:r>
-                        <a:rPr sz="1150" b="0">
+                        <a:rPr sz="1200" b="0">
                           <a:solidFill>
                             <a:srgbClr val="222222"/>
                           </a:solidFill>
@@ -45297,7 +45297,7 @@
                   </a:tcPr>
                 </a:tc>
               </a:tr>
-              <a:tr h="342000">
+              <a:tr h="413999">
                 <a:tc>
                   <a:txBody>
                     <a:bodyPr wrap="square"/>
@@ -45315,7 +45315,7 @@
                         </a:spcAft>
                       </a:pPr>
                       <a:r>
-                        <a:rPr sz="1150" b="1">
+                        <a:rPr sz="1200" b="1">
                           <a:solidFill>
                             <a:srgbClr val="222222"/>
                           </a:solidFill>
@@ -45370,7 +45370,7 @@
                         </a:spcAft>
                       </a:pPr>
                       <a:r>
-                        <a:rPr sz="1150" b="0">
+                        <a:rPr sz="1200" b="0">
                           <a:solidFill>
                             <a:srgbClr val="222222"/>
                           </a:solidFill>
@@ -45409,7 +45409,7 @@
                   </a:tcPr>
                 </a:tc>
               </a:tr>
-              <a:tr h="342000">
+              <a:tr h="583689">
                 <a:tc>
                   <a:txBody>
                     <a:bodyPr wrap="square"/>
@@ -45427,7 +45427,7 @@
                         </a:spcAft>
                       </a:pPr>
                       <a:r>
-                        <a:rPr sz="1150" b="1">
+                        <a:rPr sz="1200" b="1">
                           <a:solidFill>
                             <a:srgbClr val="222222"/>
                           </a:solidFill>
@@ -45482,7 +45482,7 @@
                         </a:spcAft>
                       </a:pPr>
                       <a:r>
-                        <a:rPr sz="1150" b="0">
+                        <a:rPr sz="1200" b="0">
                           <a:solidFill>
                             <a:srgbClr val="222222"/>
                           </a:solidFill>
@@ -45533,7 +45533,7 @@
         </p:nvSpPr>
         <p:spPr>
           <a:xfrm>
-            <a:off x="302400" y="4182384"/>
+            <a:off x="302400" y="4691534"/>
             <a:ext cx="46800" cy="223200"/>
           </a:xfrm>
           <a:prstGeom prst="rect">
@@ -45577,7 +45577,7 @@
         </p:nvSpPr>
         <p:spPr>
           <a:xfrm>
-            <a:off x="392400" y="4167984"/>
+            <a:off x="392400" y="4677134"/>
             <a:ext cx="6156000" cy="251999"/>
           </a:xfrm>
           <a:prstGeom prst="rect">
@@ -45614,8 +45614,8 @@
           <p:nvPr/>
         </p:nvGraphicFramePr>
         <p:xfrm>
-          <a:off x="316800" y="4491984"/>
-          <a:ext cx="6260400" cy="1723922"/>
+          <a:off x="316800" y="5001134"/>
+          <a:ext cx="6260400" cy="1966821"/>
         </p:xfrm>
         <a:graphic>
           <a:graphicData uri="http://schemas.openxmlformats.org/drawingml/2006/table">
@@ -45627,7 +45627,7 @@
                 <a:gridCol w="1017315"/>
                 <a:gridCol w="782550"/>
               </a:tblGrid>
-              <a:tr h="333984">
+              <a:tr h="385444">
                 <a:tc>
                   <a:txBody>
                     <a:bodyPr wrap="square"/>
@@ -45645,7 +45645,7 @@
                         </a:spcAft>
                       </a:pPr>
                       <a:r>
-                        <a:rPr sz="1200" b="1">
+                        <a:rPr sz="1250" b="1">
                           <a:solidFill>
                             <a:srgbClr val="FFFFFF"/>
                           </a:solidFill>
@@ -45700,7 +45700,7 @@
                         </a:spcAft>
                       </a:pPr>
                       <a:r>
-                        <a:rPr sz="1200" b="1">
+                        <a:rPr sz="1250" b="1">
                           <a:solidFill>
                             <a:srgbClr val="FFFFFF"/>
                           </a:solidFill>
@@ -45755,7 +45755,7 @@
                         </a:spcAft>
                       </a:pPr>
                       <a:r>
-                        <a:rPr sz="1200" b="1">
+                        <a:rPr sz="1250" b="1">
                           <a:solidFill>
                             <a:srgbClr val="FFFFFF"/>
                           </a:solidFill>
@@ -45810,7 +45810,7 @@
                         </a:spcAft>
                       </a:pPr>
                       <a:r>
-                        <a:rPr sz="1200" b="1">
+                        <a:rPr sz="1250" b="1">
                           <a:solidFill>
                             <a:srgbClr val="FFFFFF"/>
                           </a:solidFill>
@@ -45849,7 +45849,7 @@
                   </a:tcPr>
                 </a:tc>
               </a:tr>
-              <a:tr h="523969">
+              <a:tr h="583689">
                 <a:tc>
                   <a:txBody>
                     <a:bodyPr wrap="square"/>
@@ -45867,7 +45867,7 @@
                         </a:spcAft>
                       </a:pPr>
                       <a:r>
-                        <a:rPr sz="1150" b="1">
+                        <a:rPr sz="1200" b="1">
                           <a:solidFill>
                             <a:srgbClr val="222222"/>
                           </a:solidFill>
@@ -45922,7 +45922,7 @@
                         </a:spcAft>
                       </a:pPr>
                       <a:r>
-                        <a:rPr sz="1150" b="0">
+                        <a:rPr sz="1200" b="0">
                           <a:solidFill>
                             <a:srgbClr val="222222"/>
                           </a:solidFill>
@@ -45977,7 +45977,7 @@
                         </a:spcAft>
                       </a:pPr>
                       <a:r>
-                        <a:rPr sz="1150" b="0">
+                        <a:rPr sz="1200" b="0">
                           <a:solidFill>
                             <a:srgbClr val="222222"/>
                           </a:solidFill>
@@ -46032,7 +46032,7 @@
                         </a:spcAft>
                       </a:pPr>
                       <a:r>
-                        <a:rPr sz="1150" b="0">
+                        <a:rPr sz="1200" b="0">
                           <a:solidFill>
                             <a:srgbClr val="222222"/>
                           </a:solidFill>
@@ -46071,7 +46071,7 @@
                   </a:tcPr>
                 </a:tc>
               </a:tr>
-              <a:tr h="342000">
+              <a:tr h="413999">
                 <a:tc>
                   <a:txBody>
                     <a:bodyPr wrap="square"/>
@@ -46089,7 +46089,7 @@
                         </a:spcAft>
                       </a:pPr>
                       <a:r>
-                        <a:rPr sz="1150" b="1">
+                        <a:rPr sz="1200" b="1">
                           <a:solidFill>
                             <a:srgbClr val="222222"/>
                           </a:solidFill>
@@ -46144,7 +46144,7 @@
                         </a:spcAft>
                       </a:pPr>
                       <a:r>
-                        <a:rPr sz="1150" b="0">
+                        <a:rPr sz="1200" b="0">
                           <a:solidFill>
                             <a:srgbClr val="222222"/>
                           </a:solidFill>
@@ -46199,7 +46199,7 @@
                         </a:spcAft>
                       </a:pPr>
                       <a:r>
-                        <a:rPr sz="1150" b="0">
+                        <a:rPr sz="1200" b="0">
                           <a:solidFill>
                             <a:srgbClr val="222222"/>
                           </a:solidFill>
@@ -46254,7 +46254,7 @@
                         </a:spcAft>
                       </a:pPr>
                       <a:r>
-                        <a:rPr sz="1150" b="0">
+                        <a:rPr sz="1200" b="0">
                           <a:solidFill>
                             <a:srgbClr val="222222"/>
                           </a:solidFill>
@@ -46293,7 +46293,7 @@
                   </a:tcPr>
                 </a:tc>
               </a:tr>
-              <a:tr h="523969">
+              <a:tr h="583689">
                 <a:tc>
                   <a:txBody>
                     <a:bodyPr wrap="square"/>
@@ -46311,7 +46311,7 @@
                         </a:spcAft>
                       </a:pPr>
                       <a:r>
-                        <a:rPr sz="1150" b="1">
+                        <a:rPr sz="1200" b="1">
                           <a:solidFill>
                             <a:srgbClr val="222222"/>
                           </a:solidFill>
@@ -46366,7 +46366,7 @@
                         </a:spcAft>
                       </a:pPr>
                       <a:r>
-                        <a:rPr sz="1150" b="0">
+                        <a:rPr sz="1200" b="0">
                           <a:solidFill>
                             <a:srgbClr val="222222"/>
                           </a:solidFill>
@@ -46421,7 +46421,7 @@
                         </a:spcAft>
                       </a:pPr>
                       <a:r>
-                        <a:rPr sz="1150" b="0">
+                        <a:rPr sz="1200" b="0">
                           <a:solidFill>
                             <a:srgbClr val="222222"/>
                           </a:solidFill>
@@ -46476,7 +46476,7 @@
                         </a:spcAft>
                       </a:pPr>
                       <a:r>
-                        <a:rPr sz="1150" b="0">
+                        <a:rPr sz="1200" b="0">
                           <a:solidFill>
                             <a:srgbClr val="222222"/>
                           </a:solidFill>
@@ -46527,8 +46527,8 @@
         </p:nvSpPr>
         <p:spPr>
           <a:xfrm>
-            <a:off x="316800" y="6323907"/>
-            <a:ext cx="2026800" cy="941173"/>
+            <a:off x="316800" y="7075958"/>
+            <a:ext cx="2026800" cy="1007999"/>
           </a:xfrm>
           <a:prstGeom prst="rect">
             <a:avLst/>
@@ -46573,7 +46573,7 @@
         </p:nvSpPr>
         <p:spPr>
           <a:xfrm>
-            <a:off x="316800" y="6323907"/>
+            <a:off x="316800" y="7075958"/>
             <a:ext cx="2026800" cy="234000"/>
           </a:xfrm>
           <a:prstGeom prst="rect">
@@ -46638,8 +46638,8 @@
         </p:nvSpPr>
         <p:spPr>
           <a:xfrm>
-            <a:off x="352800" y="6583107"/>
-            <a:ext cx="1954800" cy="689173"/>
+            <a:off x="352800" y="7335158"/>
+            <a:ext cx="1954800" cy="756000"/>
           </a:xfrm>
           <a:prstGeom prst="rect">
             <a:avLst/>
@@ -46666,7 +46666,7 @@
               <a:buChar char="•"/>
             </a:pPr>
             <a:r>
-              <a:rPr sz="1100" b="0">
+              <a:rPr sz="1150" b="0">
                 <a:solidFill>
                   <a:srgbClr val="000000"/>
                 </a:solidFill>
@@ -46692,7 +46692,7 @@
               <a:buChar char="•"/>
             </a:pPr>
             <a:r>
-              <a:rPr sz="1100" b="0">
+              <a:rPr sz="1150" b="0">
                 <a:solidFill>
                   <a:srgbClr val="000000"/>
                 </a:solidFill>
@@ -46713,8 +46713,8 @@
         </p:nvSpPr>
         <p:spPr>
           <a:xfrm>
-            <a:off x="2433600" y="6323907"/>
-            <a:ext cx="2026800" cy="941173"/>
+            <a:off x="2433600" y="7075958"/>
+            <a:ext cx="2026800" cy="1007999"/>
           </a:xfrm>
           <a:prstGeom prst="rect">
             <a:avLst/>
@@ -46759,7 +46759,7 @@
         </p:nvSpPr>
         <p:spPr>
           <a:xfrm>
-            <a:off x="2433600" y="6323907"/>
+            <a:off x="2433600" y="7075958"/>
             <a:ext cx="2026800" cy="234000"/>
           </a:xfrm>
           <a:prstGeom prst="rect">
@@ -46824,8 +46824,8 @@
         </p:nvSpPr>
         <p:spPr>
           <a:xfrm>
-            <a:off x="2469600" y="6583107"/>
-            <a:ext cx="1954800" cy="689173"/>
+            <a:off x="2469600" y="7335158"/>
+            <a:ext cx="1954800" cy="756000"/>
           </a:xfrm>
           <a:prstGeom prst="rect">
             <a:avLst/>
@@ -46852,7 +46852,7 @@
               <a:buChar char="•"/>
             </a:pPr>
             <a:r>
-              <a:rPr sz="1100" b="0">
+              <a:rPr sz="1150" b="0">
                 <a:solidFill>
                   <a:srgbClr val="000000"/>
                 </a:solidFill>
@@ -46878,7 +46878,7 @@
               <a:buChar char="•"/>
             </a:pPr>
             <a:r>
-              <a:rPr sz="1100" b="0">
+              <a:rPr sz="1150" b="0">
                 <a:solidFill>
                   <a:srgbClr val="000000"/>
                 </a:solidFill>
@@ -46899,8 +46899,8 @@
         </p:nvSpPr>
         <p:spPr>
           <a:xfrm>
-            <a:off x="4550400" y="6323907"/>
-            <a:ext cx="2026800" cy="941173"/>
+            <a:off x="4550400" y="7075958"/>
+            <a:ext cx="2026800" cy="1007999"/>
           </a:xfrm>
           <a:prstGeom prst="rect">
             <a:avLst/>
@@ -46945,7 +46945,7 @@
         </p:nvSpPr>
         <p:spPr>
           <a:xfrm>
-            <a:off x="4550400" y="6323907"/>
+            <a:off x="4550400" y="7075958"/>
             <a:ext cx="2026800" cy="234000"/>
           </a:xfrm>
           <a:prstGeom prst="rect">
@@ -47010,8 +47010,8 @@
         </p:nvSpPr>
         <p:spPr>
           <a:xfrm>
-            <a:off x="4586400" y="6583107"/>
-            <a:ext cx="1954800" cy="689173"/>
+            <a:off x="4586400" y="7335158"/>
+            <a:ext cx="1954800" cy="756000"/>
           </a:xfrm>
           <a:prstGeom prst="rect">
             <a:avLst/>
@@ -47038,7 +47038,7 @@
               <a:buChar char="•"/>
             </a:pPr>
             <a:r>
-              <a:rPr sz="1100" b="0">
+              <a:rPr sz="1150" b="0">
                 <a:solidFill>
                   <a:srgbClr val="000000"/>
                 </a:solidFill>
@@ -47064,7 +47064,7 @@
               <a:buChar char="•"/>
             </a:pPr>
             <a:r>
-              <a:rPr sz="1100" b="0">
+              <a:rPr sz="1150" b="0">
                 <a:solidFill>
                   <a:srgbClr val="000000"/>
                 </a:solidFill>
@@ -47085,8 +47085,8 @@
         </p:nvSpPr>
         <p:spPr>
           <a:xfrm>
-            <a:off x="280800" y="7409080"/>
-            <a:ext cx="6332400" cy="342135"/>
+            <a:off x="280800" y="8227958"/>
+            <a:ext cx="6332400" cy="350713"/>
           </a:xfrm>
           <a:prstGeom prst="roundRect">
             <a:avLst>
@@ -47133,7 +47133,7 @@
               </a:spcAft>
             </a:pPr>
             <a:r>
-              <a:rPr sz="1050" b="1">
+              <a:rPr sz="1100" b="1">
                 <a:solidFill>
                   <a:srgbClr val="7F3F00"/>
                 </a:solidFill>
